--- a/research-materials/slides/05_進捗報告③_20261127_本実験の開始.pptx
+++ b/research-materials/slides/05_進捗報告③_20261127_本実験の開始.pptx
@@ -152,6 +152,9 @@
                 <a:solidFill>
                   <a:srgbClr val="0B3C6E"/>
                 </a:solidFill>
+                <a:latin typeface="BIZ UDPゴシック"/>
+                <a:ea typeface="BIZ UDPゴシック"/>
+                <a:cs typeface="BIZ UDPゴシック"/>
               </a:rPr>
               <a:t>日ごとの記録率（全参加者・%）</a:t>
             </a:r>
@@ -215,6 +218,9 @@
                       <a:solidFill>
                         <a:srgbClr val="0099FF"/>
                       </a:solidFill>
+                      <a:latin typeface="BIZ UDPゴシック"/>
+                      <a:ea typeface="BIZ UDPゴシック"/>
+                      <a:cs typeface="BIZ UDPゴシック"/>
                     </a:defRPr>
                   </a:pPr>
                 </a:p>
@@ -369,6 +375,9 @@
                 <a:solidFill>
                   <a:srgbClr val="24303F"/>
                 </a:solidFill>
+                <a:latin typeface="BIZ UDPゴシック"/>
+                <a:ea typeface="BIZ UDPゴシック"/>
+                <a:cs typeface="BIZ UDPゴシック"/>
               </a:defRPr>
             </a:pPr>
           </a:p>
@@ -415,6 +424,9 @@
                 <a:solidFill>
                   <a:srgbClr val="5A6676"/>
                 </a:solidFill>
+                <a:latin typeface="BIZ UDPゴシック"/>
+                <a:ea typeface="BIZ UDPゴシック"/>
+                <a:cs typeface="BIZ UDPゴシック"/>
               </a:defRPr>
             </a:pPr>
           </a:p>
@@ -437,9 +449,16 @@
           <a:solidFill>
             <a:srgbClr val="5A6676"/>
           </a:solidFill>
+          <a:latin typeface="BIZ UDPゴシック"/>
+          <a:ea typeface="BIZ UDPゴシック"/>
+          <a:cs typeface="BIZ UDPゴシック"/>
         </a:defRPr>
       </a:pPr>
-      <a:endParaRPr lang="en-US"/>
+      <a:endParaRPr lang="en-US">
+        <a:latin typeface="BIZ UDPゴシック"/>
+        <a:ea typeface="BIZ UDPゴシック"/>
+        <a:cs typeface="BIZ UDPゴシック"/>
+      </a:endParaRPr>
     </a:p>
   </c:txPr>
   <c:externalData r:id="rId1">
@@ -463,6 +482,9 @@
                 <a:solidFill>
                   <a:srgbClr val="0B3C6E"/>
                 </a:solidFill>
+                <a:latin typeface="BIZ UDPゴシック"/>
+                <a:ea typeface="BIZ UDPゴシック"/>
+                <a:cs typeface="BIZ UDPゴシック"/>
               </a:rPr>
               <a:t>80%予測区間の幅（±）</a:t>
             </a:r>
@@ -588,6 +610,9 @@
                   <a:solidFill>
                     <a:srgbClr val="24303F"/>
                   </a:solidFill>
+                  <a:latin typeface="BIZ UDPゴシック"/>
+                  <a:ea typeface="BIZ UDPゴシック"/>
+                  <a:cs typeface="BIZ UDPゴシック"/>
                 </a:defRPr>
               </a:pPr>
             </a:p>
@@ -632,6 +657,9 @@
                 <a:solidFill>
                   <a:srgbClr val="24303F"/>
                 </a:solidFill>
+                <a:latin typeface="BIZ UDPゴシック"/>
+                <a:ea typeface="BIZ UDPゴシック"/>
+                <a:cs typeface="BIZ UDPゴシック"/>
               </a:defRPr>
             </a:pPr>
           </a:p>
@@ -678,6 +706,9 @@
                 <a:solidFill>
                   <a:srgbClr val="5A6676"/>
                 </a:solidFill>
+                <a:latin typeface="BIZ UDPゴシック"/>
+                <a:ea typeface="BIZ UDPゴシック"/>
+                <a:cs typeface="BIZ UDPゴシック"/>
               </a:defRPr>
             </a:pPr>
           </a:p>
@@ -695,7 +726,11 @@
         <a:lstStyle/>
         <a:p>
           <a:pPr>
-            <a:defRPr sz="1100"/>
+            <a:defRPr sz="1100">
+              <a:latin typeface="BIZ UDPゴシック"/>
+              <a:ea typeface="BIZ UDPゴシック"/>
+              <a:cs typeface="BIZ UDPゴシック"/>
+            </a:defRPr>
           </a:pPr>
         </a:p>
       </c:txPr>
@@ -711,9 +746,16 @@
           <a:solidFill>
             <a:srgbClr val="5A6676"/>
           </a:solidFill>
+          <a:latin typeface="BIZ UDPゴシック"/>
+          <a:ea typeface="BIZ UDPゴシック"/>
+          <a:cs typeface="BIZ UDPゴシック"/>
         </a:defRPr>
       </a:pPr>
-      <a:endParaRPr lang="en-US"/>
+      <a:endParaRPr lang="en-US">
+        <a:latin typeface="BIZ UDPゴシック"/>
+        <a:ea typeface="BIZ UDPゴシック"/>
+        <a:cs typeface="BIZ UDPゴシック"/>
+      </a:endParaRPr>
     </a:p>
   </c:txPr>
   <c:externalData r:id="rId1">
@@ -737,6 +779,9 @@
                 <a:solidFill>
                   <a:srgbClr val="0B3C6E"/>
                 </a:solidFill>
+                <a:latin typeface="BIZ UDPゴシック"/>
+                <a:ea typeface="BIZ UDPゴシック"/>
+                <a:cs typeface="BIZ UDPゴシック"/>
               </a:rPr>
               <a:t>最も多く選ばれた疲れの中身（参加者ごと）</a:t>
             </a:r>
@@ -856,6 +901,9 @@
                   <a:solidFill>
                     <a:srgbClr val="24303F"/>
                   </a:solidFill>
+                  <a:latin typeface="BIZ UDPゴシック"/>
+                  <a:ea typeface="BIZ UDPゴシック"/>
+                  <a:cs typeface="BIZ UDPゴシック"/>
                 </a:defRPr>
               </a:pPr>
             </a:p>
@@ -899,6 +947,9 @@
                 <a:solidFill>
                   <a:srgbClr val="24303F"/>
                 </a:solidFill>
+                <a:latin typeface="BIZ UDPゴシック"/>
+                <a:ea typeface="BIZ UDPゴシック"/>
+                <a:cs typeface="BIZ UDPゴシック"/>
               </a:defRPr>
             </a:pPr>
           </a:p>
@@ -945,6 +996,9 @@
                 <a:solidFill>
                   <a:srgbClr val="5A6676"/>
                 </a:solidFill>
+                <a:latin typeface="BIZ UDPゴシック"/>
+                <a:ea typeface="BIZ UDPゴシック"/>
+                <a:cs typeface="BIZ UDPゴシック"/>
               </a:defRPr>
             </a:pPr>
           </a:p>
@@ -965,9 +1019,16 @@
           <a:solidFill>
             <a:srgbClr val="5A6676"/>
           </a:solidFill>
+          <a:latin typeface="BIZ UDPゴシック"/>
+          <a:ea typeface="BIZ UDPゴシック"/>
+          <a:cs typeface="BIZ UDPゴシック"/>
         </a:defRPr>
       </a:pPr>
-      <a:endParaRPr lang="en-US"/>
+      <a:endParaRPr lang="en-US">
+        <a:latin typeface="BIZ UDPゴシック"/>
+        <a:ea typeface="BIZ UDPゴシック"/>
+        <a:cs typeface="BIZ UDPゴシック"/>
+      </a:endParaRPr>
     </a:p>
   </c:txPr>
   <c:externalData r:id="rId1">
@@ -991,6 +1052,9 @@
                 <a:solidFill>
                   <a:srgbClr val="0B3C6E"/>
                 </a:solidFill>
+                <a:latin typeface="BIZ UDPゴシック"/>
+                <a:ea typeface="BIZ UDPゴシック"/>
+                <a:cs typeface="BIZ UDPゴシック"/>
               </a:rPr>
               <a:t>選ばれた提案の割合</a:t>
             </a:r>
@@ -1216,6 +1280,9 @@
                   <a:solidFill>
                     <a:srgbClr val="FFFFFF"/>
                   </a:solidFill>
+                  <a:latin typeface="BIZ UDPゴシック"/>
+                  <a:ea typeface="BIZ UDPゴシック"/>
+                  <a:cs typeface="BIZ UDPゴシック"/>
                 </a:defRPr>
               </a:pPr>
             </a:p>
@@ -1260,6 +1327,9 @@
                 <a:solidFill>
                   <a:srgbClr val="24303F"/>
                 </a:solidFill>
+                <a:latin typeface="BIZ UDPゴシック"/>
+                <a:ea typeface="BIZ UDPゴシック"/>
+                <a:cs typeface="BIZ UDPゴシック"/>
               </a:defRPr>
             </a:pPr>
           </a:p>
@@ -1306,6 +1376,9 @@
                 <a:solidFill>
                   <a:srgbClr val="5A6676"/>
                 </a:solidFill>
+                <a:latin typeface="BIZ UDPゴシック"/>
+                <a:ea typeface="BIZ UDPゴシック"/>
+                <a:cs typeface="BIZ UDPゴシック"/>
               </a:defRPr>
             </a:pPr>
           </a:p>
@@ -1322,7 +1395,11 @@
         <a:lstStyle/>
         <a:p>
           <a:pPr>
-            <a:defRPr sz="1100"/>
+            <a:defRPr sz="1100">
+              <a:latin typeface="BIZ UDPゴシック"/>
+              <a:ea typeface="BIZ UDPゴシック"/>
+              <a:cs typeface="BIZ UDPゴシック"/>
+            </a:defRPr>
           </a:pPr>
         </a:p>
       </c:txPr>
@@ -1338,9 +1415,16 @@
           <a:solidFill>
             <a:srgbClr val="5A6676"/>
           </a:solidFill>
+          <a:latin typeface="BIZ UDPゴシック"/>
+          <a:ea typeface="BIZ UDPゴシック"/>
+          <a:cs typeface="BIZ UDPゴシック"/>
         </a:defRPr>
       </a:pPr>
-      <a:endParaRPr lang="en-US"/>
+      <a:endParaRPr lang="en-US">
+        <a:latin typeface="BIZ UDPゴシック"/>
+        <a:ea typeface="BIZ UDPゴシック"/>
+        <a:cs typeface="BIZ UDPゴシック"/>
+      </a:endParaRPr>
     </a:p>
   </c:txPr>
   <c:externalData r:id="rId1">
@@ -5247,7 +5331,7 @@
         <p:spPr>
           <a:xfrm>
             <a:off x="0" y="855796"/>
-            <a:ext cx="5115503" cy="300082"/>
+            <a:ext cx="6200000" cy="300082"/>
           </a:xfrm>
           <a:prstGeom prst="rect">
             <a:avLst/>
@@ -5700,6 +5784,9 @@
                 <a:solidFill>
                   <a:srgbClr val="24303F"/>
                 </a:solidFill>
+                <a:latin typeface="BIZ UDPゴシック"/>
+                <a:ea typeface="BIZ UDPゴシック"/>
+                <a:cs typeface="BIZ UDPゴシック"/>
               </a:rPr>
               <a:t>進捗報告 2026/11/27</a:t>
             </a:r>
@@ -5734,6 +5821,9 @@
                 <a:solidFill>
                   <a:srgbClr val="24303F"/>
                 </a:solidFill>
+                <a:latin typeface="BIZ UDPゴシック"/>
+                <a:ea typeface="BIZ UDPゴシック"/>
+                <a:cs typeface="BIZ UDPゴシック"/>
               </a:rPr>
               <a:t>今井元</a:t>
             </a:r>
@@ -5775,6 +5865,9 @@
                 <a:solidFill>
                   <a:srgbClr val="24303F"/>
                 </a:solidFill>
+                <a:latin typeface="BIZ UDPゴシック"/>
+                <a:ea typeface="BIZ UDPゴシック"/>
+                <a:cs typeface="BIZ UDPゴシック"/>
               </a:rPr>
               <a:t>メディアインタラクション研究室　進捗報告</a:t>
             </a:r>
@@ -5814,6 +5907,9 @@
                 <a:solidFill>
                   <a:srgbClr val="24303F"/>
                 </a:solidFill>
+                <a:latin typeface="BIZ UDPゴシック"/>
+                <a:ea typeface="BIZ UDPゴシック"/>
+                <a:cs typeface="BIZ UDPゴシック"/>
               </a:rPr>
               <a:t>大阪工業大学</a:t>
             </a:r>
@@ -5830,6 +5926,9 @@
                 <a:solidFill>
                   <a:srgbClr val="24303F"/>
                 </a:solidFill>
+                <a:latin typeface="BIZ UDPゴシック"/>
+                <a:ea typeface="BIZ UDPゴシック"/>
+                <a:cs typeface="BIZ UDPゴシック"/>
               </a:rPr>
               <a:t>メディアインタラクション研究室</a:t>
             </a:r>
@@ -5872,6 +5971,9 @@
                 <a:solidFill>
                   <a:srgbClr val="FFFFFF"/>
                 </a:solidFill>
+                <a:latin typeface="BIZ UDPゴシック"/>
+                <a:ea typeface="BIZ UDPゴシック"/>
+                <a:cs typeface="BIZ UDPゴシック"/>
               </a:rPr>
               <a:t>本実験がスタート</a:t>
             </a:r>
@@ -5891,6 +5993,9 @@
                 <a:solidFill>
                   <a:srgbClr val="FFFFFF"/>
                 </a:solidFill>
+                <a:latin typeface="BIZ UDPゴシック"/>
+                <a:ea typeface="BIZ UDPゴシック"/>
+                <a:cs typeface="BIZ UDPゴシック"/>
               </a:rPr>
               <a:t>最初の2週間の記録と3群への割付</a:t>
             </a:r>
@@ -5910,6 +6015,9 @@
                 <a:solidFill>
                   <a:srgbClr val="FFFFFF"/>
                 </a:solidFill>
+                <a:latin typeface="BIZ UDPゴシック"/>
+                <a:ea typeface="BIZ UDPゴシック"/>
+                <a:cs typeface="BIZ UDPゴシック"/>
               </a:rPr>
               <a:t>介入1週目の提案の選ばれ方 ／ 実験中に起きたこと</a:t>
             </a:r>
@@ -5986,6 +6094,9 @@
                 <a:solidFill>
                   <a:srgbClr val="24303F"/>
                 </a:solidFill>
+                <a:latin typeface="BIZ UDPゴシック"/>
+                <a:ea typeface="BIZ UDPゴシック"/>
+                <a:cs typeface="BIZ UDPゴシック"/>
               </a:rPr>
               <a:t>実験中に起きたことと対応</a:t>
             </a:r>
@@ -6004,9 +6115,14 @@
         </p:nvSpPr>
         <p:spPr/>
         <p:txBody>
-          <a:bodyPr/>
-          <a:p>
-            <a:r>
+          <a:bodyPr lIns="27432" rIns="0" wrap="none"/>
+          <a:p>
+            <a:r>
+              <a:rPr sz="900">
+                <a:latin typeface="BIZ UDPゴシック"/>
+                <a:ea typeface="BIZ UDPゴシック"/>
+                <a:cs typeface="BIZ UDPゴシック"/>
+              </a:rPr>
               <a:t>2026/11/27</a:t>
             </a:r>
           </a:p>
@@ -6027,7 +6143,11 @@
           <a:bodyPr/>
           <a:p>
             <a:fld id="{B6F15528-21DE-4FAA-801E-634DDDAF4B2B}" type="slidenum">
-              <a:rPr lang="en-US"/>
+              <a:rPr lang="en-US">
+                <a:latin typeface="BIZ UDPゴシック"/>
+                <a:ea typeface="BIZ UDPゴシック"/>
+                <a:cs typeface="BIZ UDPゴシック"/>
+              </a:rPr>
               <a:t>10</a:t>
             </a:fld>
           </a:p>
@@ -6076,6 +6196,9 @@
                           <a:solidFill>
                             <a:srgbClr val="FFFFFF"/>
                           </a:solidFill>
+                          <a:latin typeface="BIZ UDPゴシック"/>
+                          <a:ea typeface="BIZ UDPゴシック"/>
+                          <a:cs typeface="BIZ UDPゴシック"/>
                         </a:rPr>
                         <a:t>日付</a:t>
                       </a:r>
@@ -6125,6 +6248,9 @@
                           <a:solidFill>
                             <a:srgbClr val="FFFFFF"/>
                           </a:solidFill>
+                          <a:latin typeface="BIZ UDPゴシック"/>
+                          <a:ea typeface="BIZ UDPゴシック"/>
+                          <a:cs typeface="BIZ UDPゴシック"/>
                         </a:rPr>
                         <a:t>起きたこと</a:t>
                       </a:r>
@@ -6174,6 +6300,9 @@
                           <a:solidFill>
                             <a:srgbClr val="FFFFFF"/>
                           </a:solidFill>
+                          <a:latin typeface="BIZ UDPゴシック"/>
+                          <a:ea typeface="BIZ UDPゴシック"/>
+                          <a:cs typeface="BIZ UDPゴシック"/>
                         </a:rPr>
                         <a:t>対応</a:t>
                       </a:r>
@@ -6223,6 +6352,9 @@
                           <a:solidFill>
                             <a:srgbClr val="FFFFFF"/>
                           </a:solidFill>
+                          <a:latin typeface="BIZ UDPゴシック"/>
+                          <a:ea typeface="BIZ UDPゴシック"/>
+                          <a:cs typeface="BIZ UDPゴシック"/>
                         </a:rPr>
                         <a:t>影響</a:t>
                       </a:r>
@@ -6274,6 +6406,9 @@
                           <a:solidFill>
                             <a:srgbClr val="24303F"/>
                           </a:solidFill>
+                          <a:latin typeface="BIZ UDPゴシック"/>
+                          <a:ea typeface="BIZ UDPゴシック"/>
+                          <a:cs typeface="BIZ UDPゴシック"/>
                         </a:rPr>
                         <a:t>11/6</a:t>
                       </a:r>
@@ -6323,6 +6458,9 @@
                           <a:solidFill>
                             <a:srgbClr val="24303F"/>
                           </a:solidFill>
+                          <a:latin typeface="BIZ UDPゴシック"/>
+                          <a:ea typeface="BIZ UDPゴシック"/>
+                          <a:cs typeface="BIZ UDPゴシック"/>
                         </a:rPr>
                         <a:t>Android で通知が最大2時間遅れる</a:t>
                       </a:r>
@@ -6372,6 +6510,9 @@
                           <a:solidFill>
                             <a:srgbClr val="24303F"/>
                           </a:solidFill>
+                          <a:latin typeface="BIZ UDPゴシック"/>
+                          <a:ea typeface="BIZ UDPゴシック"/>
+                          <a:cs typeface="BIZ UDPゴシック"/>
                         </a:rPr>
                         <a:t>通知の優先度を上げて修正（11/18・全群共通）</a:t>
                       </a:r>
@@ -6421,6 +6562,9 @@
                           <a:solidFill>
                             <a:srgbClr val="24303F"/>
                           </a:solidFill>
+                          <a:latin typeface="BIZ UDPゴシック"/>
+                          <a:ea typeface="BIZ UDPゴシック"/>
+                          <a:cs typeface="BIZ UDPゴシック"/>
                         </a:rPr>
                         <a:t>記録率への影響は小さい</a:t>
                       </a:r>
@@ -6472,6 +6616,9 @@
                           <a:solidFill>
                             <a:srgbClr val="24303F"/>
                           </a:solidFill>
+                          <a:latin typeface="BIZ UDPゴシック"/>
+                          <a:ea typeface="BIZ UDPゴシック"/>
+                          <a:cs typeface="BIZ UDPゴシック"/>
                         </a:rPr>
                         <a:t>11/9〜</a:t>
                       </a:r>
@@ -6521,6 +6668,9 @@
                           <a:solidFill>
                             <a:srgbClr val="24303F"/>
                           </a:solidFill>
+                          <a:latin typeface="BIZ UDPゴシック"/>
+                          <a:ea typeface="BIZ UDPゴシック"/>
+                          <a:cs typeface="BIZ UDPゴシック"/>
                         </a:rPr>
                         <a:t>強い疲れの記録で相談先を表示（3件）</a:t>
                       </a:r>
@@ -6570,6 +6720,9 @@
                           <a:solidFill>
                             <a:srgbClr val="24303F"/>
                           </a:solidFill>
+                          <a:latin typeface="BIZ UDPゴシック"/>
+                          <a:ea typeface="BIZ UDPゴシック"/>
+                          <a:cs typeface="BIZ UDPゴシック"/>
                         </a:rPr>
                         <a:t>手順どおり表示。継続は本人の判断</a:t>
                       </a:r>
@@ -6619,6 +6772,9 @@
                           <a:solidFill>
                             <a:srgbClr val="24303F"/>
                           </a:solidFill>
+                          <a:latin typeface="BIZ UDPゴシック"/>
+                          <a:ea typeface="BIZ UDPゴシック"/>
+                          <a:cs typeface="BIZ UDPゴシック"/>
                         </a:rPr>
                         <a:t>各群1件ずつ</a:t>
                       </a:r>
@@ -6670,6 +6826,9 @@
                           <a:solidFill>
                             <a:srgbClr val="24303F"/>
                           </a:solidFill>
+                          <a:latin typeface="BIZ UDPゴシック"/>
+                          <a:ea typeface="BIZ UDPゴシック"/>
+                          <a:cs typeface="BIZ UDPゴシック"/>
                         </a:rPr>
                         <a:t>11/20</a:t>
                       </a:r>
@@ -6719,6 +6878,9 @@
                           <a:solidFill>
                             <a:srgbClr val="24303F"/>
                           </a:solidFill>
+                          <a:latin typeface="BIZ UDPゴシック"/>
+                          <a:ea typeface="BIZ UDPゴシック"/>
+                          <a:cs typeface="BIZ UDPゴシック"/>
                         </a:rPr>
                         <a:t>「今のままの顔を見るのがつらい」（群C・1名）</a:t>
                       </a:r>
@@ -6768,6 +6930,9 @@
                           <a:solidFill>
                             <a:srgbClr val="24303F"/>
                           </a:solidFill>
+                          <a:latin typeface="BIZ UDPゴシック"/>
+                          <a:ea typeface="BIZ UDPゴシック"/>
+                          <a:cs typeface="BIZ UDPゴシック"/>
                         </a:rPr>
                         <a:t>ミラーの非表示設定を案内</a:t>
                       </a:r>
@@ -6817,6 +6982,9 @@
                           <a:solidFill>
                             <a:srgbClr val="24303F"/>
                           </a:solidFill>
+                          <a:latin typeface="BIZ UDPゴシック"/>
+                          <a:ea typeface="BIZ UDPゴシック"/>
+                          <a:cs typeface="BIZ UDPゴシック"/>
                         </a:rPr>
                         <a:t>解析は群Cのまま（ITT）</a:t>
                       </a:r>
@@ -6868,6 +7036,9 @@
                           <a:solidFill>
                             <a:srgbClr val="24303F"/>
                           </a:solidFill>
+                          <a:latin typeface="BIZ UDPゴシック"/>
+                          <a:ea typeface="BIZ UDPゴシック"/>
+                          <a:cs typeface="BIZ UDPゴシック"/>
                         </a:rPr>
                         <a:t>随時</a:t>
                       </a:r>
@@ -6917,6 +7088,9 @@
                           <a:solidFill>
                             <a:srgbClr val="24303F"/>
                           </a:solidFill>
+                          <a:latin typeface="BIZ UDPゴシック"/>
+                          <a:ea typeface="BIZ UDPゴシック"/>
+                          <a:cs typeface="BIZ UDPゴシック"/>
                         </a:rPr>
                         <a:t>前日の記録を忘れた</a:t>
                       </a:r>
@@ -6966,6 +7140,9 @@
                           <a:solidFill>
                             <a:srgbClr val="24303F"/>
                           </a:solidFill>
+                          <a:latin typeface="BIZ UDPゴシック"/>
+                          <a:ea typeface="BIZ UDPゴシック"/>
+                          <a:cs typeface="BIZ UDPゴシック"/>
                         </a:rPr>
                         <a:t>前日分までの後入力を許可（事前規定）</a:t>
                       </a:r>
@@ -7015,6 +7192,9 @@
                           <a:solidFill>
                             <a:srgbClr val="24303F"/>
                           </a:solidFill>
+                          <a:latin typeface="BIZ UDPゴシック"/>
+                          <a:ea typeface="BIZ UDPゴシック"/>
+                          <a:cs typeface="BIZ UDPゴシック"/>
                         </a:rPr>
                         <a:t>後入力は記録の6%</a:t>
                       </a:r>
@@ -7194,6 +7374,9 @@
                 <a:solidFill>
                   <a:srgbClr val="0B3C6E"/>
                 </a:solidFill>
+                <a:latin typeface="BIZ UDPゴシック"/>
+                <a:ea typeface="BIZ UDPゴシック"/>
+                <a:cs typeface="BIZ UDPゴシック"/>
               </a:rPr>
               <a:t>すべて「逸脱・有害事象の記録表」に日時と内容を記録</a:t>
             </a:r>
@@ -7210,6 +7393,9 @@
                 <a:solidFill>
                   <a:srgbClr val="24303F"/>
                 </a:solidFill>
+                <a:latin typeface="BIZ UDPゴシック"/>
+                <a:ea typeface="BIZ UDPゴシック"/>
+                <a:cs typeface="BIZ UDPゴシック"/>
               </a:rPr>
               <a:t>重い有害事象はなし。相談先の表示は事前に決めた基準どおりに作動した</a:t>
             </a:r>
@@ -7273,6 +7459,9 @@
                 <a:solidFill>
                   <a:srgbClr val="E8457C"/>
                 </a:solidFill>
+                <a:latin typeface="BIZ UDPゴシック"/>
+                <a:ea typeface="BIZ UDPゴシック"/>
+                <a:cs typeface="BIZ UDPゴシック"/>
               </a:rPr>
               <a:t>※ 件数は想定値</a:t>
             </a:r>
@@ -7325,6 +7514,9 @@
                 <a:solidFill>
                   <a:srgbClr val="24303F"/>
                 </a:solidFill>
+                <a:latin typeface="BIZ UDPゴシック"/>
+                <a:ea typeface="BIZ UDPゴシック"/>
+                <a:cs typeface="BIZ UDPゴシック"/>
               </a:rPr>
               <a:t>解析計画（11/14 に版を固定）</a:t>
             </a:r>
@@ -7343,9 +7535,14 @@
         </p:nvSpPr>
         <p:spPr/>
         <p:txBody>
-          <a:bodyPr/>
-          <a:p>
-            <a:r>
+          <a:bodyPr lIns="27432" rIns="0" wrap="none"/>
+          <a:p>
+            <a:r>
+              <a:rPr sz="900">
+                <a:latin typeface="BIZ UDPゴシック"/>
+                <a:ea typeface="BIZ UDPゴシック"/>
+                <a:cs typeface="BIZ UDPゴシック"/>
+              </a:rPr>
               <a:t>2026/11/27</a:t>
             </a:r>
           </a:p>
@@ -7366,7 +7563,11 @@
           <a:bodyPr/>
           <a:p>
             <a:fld id="{B6F15528-21DE-4FAA-801E-634DDDAF4B2B}" type="slidenum">
-              <a:rPr lang="en-US"/>
+              <a:rPr lang="en-US">
+                <a:latin typeface="BIZ UDPゴシック"/>
+                <a:ea typeface="BIZ UDPゴシック"/>
+                <a:cs typeface="BIZ UDPゴシック"/>
+              </a:rPr>
               <a:t>11</a:t>
             </a:fld>
           </a:p>
@@ -7414,6 +7615,9 @@
                           <a:solidFill>
                             <a:srgbClr val="FFFFFF"/>
                           </a:solidFill>
+                          <a:latin typeface="BIZ UDPゴシック"/>
+                          <a:ea typeface="BIZ UDPゴシック"/>
+                          <a:cs typeface="BIZ UDPゴシック"/>
                         </a:rPr>
                         <a:t>問い</a:t>
                       </a:r>
@@ -7463,6 +7667,9 @@
                           <a:solidFill>
                             <a:srgbClr val="FFFFFF"/>
                           </a:solidFill>
+                          <a:latin typeface="BIZ UDPゴシック"/>
+                          <a:ea typeface="BIZ UDPゴシック"/>
+                          <a:cs typeface="BIZ UDPゴシック"/>
                         </a:rPr>
                         <a:t>目的変数</a:t>
                       </a:r>
@@ -7512,6 +7719,9 @@
                           <a:solidFill>
                             <a:srgbClr val="FFFFFF"/>
                           </a:solidFill>
+                          <a:latin typeface="BIZ UDPゴシック"/>
+                          <a:ea typeface="BIZ UDPゴシック"/>
+                          <a:cs typeface="BIZ UDPゴシック"/>
                         </a:rPr>
                         <a:t>方法</a:t>
                       </a:r>
@@ -7563,6 +7773,9 @@
                           <a:solidFill>
                             <a:srgbClr val="24303F"/>
                           </a:solidFill>
+                          <a:latin typeface="BIZ UDPゴシック"/>
+                          <a:ea typeface="BIZ UDPゴシック"/>
+                          <a:cs typeface="BIZ UDPゴシック"/>
                         </a:rPr>
                         <a:t>RQ3（主要）</a:t>
                       </a:r>
@@ -7612,6 +7825,9 @@
                           <a:solidFill>
                             <a:srgbClr val="24303F"/>
                           </a:solidFill>
+                          <a:latin typeface="BIZ UDPゴシック"/>
+                          <a:ea typeface="BIZ UDPゴシック"/>
+                          <a:cs typeface="BIZ UDPゴシック"/>
                         </a:rPr>
                         <a:t>6週時点の WHO-5</a:t>
                       </a:r>
@@ -7661,6 +7877,9 @@
                           <a:solidFill>
                             <a:srgbClr val="24303F"/>
                           </a:solidFill>
+                          <a:latin typeface="BIZ UDPゴシック"/>
+                          <a:ea typeface="BIZ UDPゴシック"/>
+                          <a:cs typeface="BIZ UDPゴシック"/>
                         </a:rPr>
                         <a:t>共分散分析（2週の WHO-5 を共変量）。C対B・B対A を Holm 法で補正</a:t>
                       </a:r>
@@ -7712,6 +7931,9 @@
                           <a:solidFill>
                             <a:srgbClr val="24303F"/>
                           </a:solidFill>
+                          <a:latin typeface="BIZ UDPゴシック"/>
+                          <a:ea typeface="BIZ UDPゴシック"/>
+                          <a:cs typeface="BIZ UDPゴシック"/>
                         </a:rPr>
                         <a:t>RQ2</a:t>
                       </a:r>
@@ -7761,6 +7983,9 @@
                           <a:solidFill>
                             <a:srgbClr val="24303F"/>
                           </a:solidFill>
+                          <a:latin typeface="BIZ UDPゴシック"/>
+                          <a:ea typeface="BIZ UDPゴシック"/>
+                          <a:cs typeface="BIZ UDPゴシック"/>
                         </a:rPr>
                         <a:t>毎週の提案の実行（する／しない）</a:t>
                       </a:r>
@@ -7810,6 +8035,9 @@
                           <a:solidFill>
                             <a:srgbClr val="24303F"/>
                           </a:solidFill>
+                          <a:latin typeface="BIZ UDPゴシック"/>
+                          <a:ea typeface="BIZ UDPゴシック"/>
+                          <a:cs typeface="BIZ UDPゴシック"/>
                         </a:rPr>
                         <a:t>ロジスティック混合モデル（群×週、参加者ごとの切片）</a:t>
                       </a:r>
@@ -7861,6 +8089,9 @@
                           <a:solidFill>
                             <a:srgbClr val="24303F"/>
                           </a:solidFill>
+                          <a:latin typeface="BIZ UDPゴシック"/>
+                          <a:ea typeface="BIZ UDPゴシック"/>
+                          <a:cs typeface="BIZ UDPゴシック"/>
                         </a:rPr>
                         <a:t>RQ1</a:t>
                       </a:r>
@@ -7910,6 +8141,9 @@
                           <a:solidFill>
                             <a:srgbClr val="24303F"/>
                           </a:solidFill>
+                          <a:latin typeface="BIZ UDPゴシック"/>
+                          <a:ea typeface="BIZ UDPゴシック"/>
+                          <a:cs typeface="BIZ UDPゴシック"/>
                         </a:rPr>
                         <a:t>6週時点の予測と実測のずれ</a:t>
                       </a:r>
@@ -7959,6 +8193,9 @@
                           <a:solidFill>
                             <a:srgbClr val="24303F"/>
                           </a:solidFill>
+                          <a:latin typeface="BIZ UDPゴシック"/>
+                          <a:ea typeface="BIZ UDPゴシック"/>
+                          <a:cs typeface="BIZ UDPゴシック"/>
                         </a:rPr>
                         <a:t>平均絶対誤差と80%区間に入った割合（母集団モデルと比較）</a:t>
                       </a:r>
@@ -8010,6 +8247,9 @@
                           <a:solidFill>
                             <a:srgbClr val="24303F"/>
                           </a:solidFill>
+                          <a:latin typeface="BIZ UDPゴシック"/>
+                          <a:ea typeface="BIZ UDPゴシック"/>
+                          <a:cs typeface="BIZ UDPゴシック"/>
                         </a:rPr>
                         <a:t>副次</a:t>
                       </a:r>
@@ -8059,6 +8299,9 @@
                           <a:solidFill>
                             <a:srgbClr val="24303F"/>
                           </a:solidFill>
+                          <a:latin typeface="BIZ UDPゴシック"/>
+                          <a:ea typeface="BIZ UDPゴシック"/>
+                          <a:cs typeface="BIZ UDPゴシック"/>
                         </a:rPr>
                         <a:t>推し疲れの中身・楽しさ・生活への支障</a:t>
                       </a:r>
@@ -8108,6 +8351,9 @@
                           <a:solidFill>
                             <a:srgbClr val="24303F"/>
                           </a:solidFill>
+                          <a:latin typeface="BIZ UDPゴシック"/>
+                          <a:ea typeface="BIZ UDPゴシック"/>
+                          <a:cs typeface="BIZ UDPゴシック"/>
                         </a:rPr>
                         <a:t>線形混合モデル。多重性の補正は行わず探索的に扱う</a:t>
                       </a:r>
@@ -8159,6 +8405,9 @@
                           <a:solidFill>
                             <a:srgbClr val="24303F"/>
                           </a:solidFill>
+                          <a:latin typeface="BIZ UDPゴシック"/>
+                          <a:ea typeface="BIZ UDPゴシック"/>
+                          <a:cs typeface="BIZ UDPゴシック"/>
                         </a:rPr>
                         <a:t>感度分析</a:t>
                       </a:r>
@@ -8208,6 +8457,9 @@
                           <a:solidFill>
                             <a:srgbClr val="24303F"/>
                           </a:solidFill>
+                          <a:latin typeface="BIZ UDPゴシック"/>
+                          <a:ea typeface="BIZ UDPゴシック"/>
+                          <a:cs typeface="BIZ UDPゴシック"/>
                         </a:rPr>
                         <a:t>欠測のある参加者を含めた主要解析</a:t>
                       </a:r>
@@ -8257,6 +8509,9 @@
                           <a:solidFill>
                             <a:srgbClr val="24303F"/>
                           </a:solidFill>
+                          <a:latin typeface="BIZ UDPゴシック"/>
+                          <a:ea typeface="BIZ UDPゴシック"/>
+                          <a:cs typeface="BIZ UDPゴシック"/>
                         </a:rPr>
                         <a:t>多重代入法（20セット）で同じ結論になるか確認</a:t>
                       </a:r>
@@ -8348,6 +8603,9 @@
                 <a:solidFill>
                   <a:srgbClr val="0B3C6E"/>
                 </a:solidFill>
+                <a:latin typeface="BIZ UDPゴシック"/>
+                <a:ea typeface="BIZ UDPゴシック"/>
+                <a:cs typeface="BIZ UDPゴシック"/>
               </a:rPr>
               <a:t>解析は割り付けた群のまま行う（ITT）。「実行した人ほど幸せか」は自己選択の偏りがあるため探索的な補助解析に限る</a:t>
             </a:r>
@@ -8400,6 +8658,9 @@
                 <a:solidFill>
                   <a:srgbClr val="24303F"/>
                 </a:solidFill>
+                <a:latin typeface="BIZ UDPゴシック"/>
+                <a:ea typeface="BIZ UDPゴシック"/>
+                <a:cs typeface="BIZ UDPゴシック"/>
               </a:rPr>
               <a:t>今後の予定と相談事項</a:t>
             </a:r>
@@ -8418,9 +8679,14 @@
         </p:nvSpPr>
         <p:spPr/>
         <p:txBody>
-          <a:bodyPr/>
-          <a:p>
-            <a:r>
+          <a:bodyPr lIns="27432" rIns="0" wrap="none"/>
+          <a:p>
+            <a:r>
+              <a:rPr sz="900">
+                <a:latin typeface="BIZ UDPゴシック"/>
+                <a:ea typeface="BIZ UDPゴシック"/>
+                <a:cs typeface="BIZ UDPゴシック"/>
+              </a:rPr>
               <a:t>2026/11/27</a:t>
             </a:r>
           </a:p>
@@ -8441,7 +8707,11 @@
           <a:bodyPr/>
           <a:p>
             <a:fld id="{B6F15528-21DE-4FAA-801E-634DDDAF4B2B}" type="slidenum">
-              <a:rPr lang="en-US"/>
+              <a:rPr lang="en-US">
+                <a:latin typeface="BIZ UDPゴシック"/>
+                <a:ea typeface="BIZ UDPゴシック"/>
+                <a:cs typeface="BIZ UDPゴシック"/>
+              </a:rPr>
               <a:t>12</a:t>
             </a:fld>
           </a:p>
@@ -8480,6 +8750,9 @@
                 <a:solidFill>
                   <a:srgbClr val="0B3C6E"/>
                 </a:solidFill>
+                <a:latin typeface="BIZ UDPゴシック"/>
+                <a:ea typeface="BIZ UDPゴシック"/>
+                <a:cs typeface="BIZ UDPゴシック"/>
               </a:rPr>
               <a:t>やること</a:t>
             </a:r>
@@ -8541,6 +8814,9 @@
                 <a:solidFill>
                   <a:srgbClr val="FFFFFF"/>
                 </a:solidFill>
+                <a:latin typeface="BIZ UDPゴシック"/>
+                <a:ea typeface="BIZ UDPゴシック"/>
+                <a:cs typeface="BIZ UDPゴシック"/>
               </a:rPr>
               <a:t>12/13</a:t>
             </a:r>
@@ -8580,6 +8856,9 @@
                 <a:solidFill>
                   <a:srgbClr val="24303F"/>
                 </a:solidFill>
+                <a:latin typeface="BIZ UDPゴシック"/>
+                <a:ea typeface="BIZ UDPゴシック"/>
+                <a:cs typeface="BIZ UDPゴシック"/>
               </a:rPr>
               <a:t>本実験の終了（6週間）</a:t>
             </a:r>
@@ -8641,6 +8920,9 @@
                 <a:solidFill>
                   <a:srgbClr val="FFFFFF"/>
                 </a:solidFill>
+                <a:latin typeface="BIZ UDPゴシック"/>
+                <a:ea typeface="BIZ UDPゴシック"/>
+                <a:cs typeface="BIZ UDPゴシック"/>
               </a:rPr>
               <a:t>12/14–16</a:t>
             </a:r>
@@ -8680,6 +8962,9 @@
                 <a:solidFill>
                   <a:srgbClr val="24303F"/>
                 </a:solidFill>
+                <a:latin typeface="BIZ UDPゴシック"/>
+                <a:ea typeface="BIZ UDPゴシック"/>
+                <a:cs typeface="BIZ UDPゴシック"/>
               </a:rPr>
               <a:t>事後アンケート（SUS・似ている度・つながり感など）</a:t>
             </a:r>
@@ -8741,6 +9026,9 @@
                 <a:solidFill>
                   <a:srgbClr val="FFFFFF"/>
                 </a:solidFill>
+                <a:latin typeface="BIZ UDPゴシック"/>
+                <a:ea typeface="BIZ UDPゴシック"/>
+                <a:cs typeface="BIZ UDPゴシック"/>
               </a:rPr>
               <a:t>12/17</a:t>
             </a:r>
@@ -8780,6 +9068,9 @@
                 <a:solidFill>
                   <a:srgbClr val="24303F"/>
                 </a:solidFill>
+                <a:latin typeface="BIZ UDPゴシック"/>
+                <a:ea typeface="BIZ UDPゴシック"/>
+                <a:cs typeface="BIZ UDPゴシック"/>
               </a:rPr>
               <a:t>データを固定して主要解析を実行</a:t>
             </a:r>
@@ -8841,6 +9132,9 @@
                 <a:solidFill>
                   <a:srgbClr val="FFFFFF"/>
                 </a:solidFill>
+                <a:latin typeface="BIZ UDPゴシック"/>
+                <a:ea typeface="BIZ UDPゴシック"/>
+                <a:cs typeface="BIZ UDPゴシック"/>
               </a:rPr>
               <a:t>12/18</a:t>
             </a:r>
@@ -8880,6 +9174,9 @@
                 <a:solidFill>
                   <a:srgbClr val="24303F"/>
                 </a:solidFill>
+                <a:latin typeface="BIZ UDPゴシック"/>
+                <a:ea typeface="BIZ UDPゴシック"/>
+                <a:cs typeface="BIZ UDPゴシック"/>
               </a:rPr>
               <a:t>次回の進捗で速報</a:t>
             </a:r>
@@ -8941,6 +9238,9 @@
                 <a:solidFill>
                   <a:srgbClr val="FFFFFF"/>
                 </a:solidFill>
+                <a:latin typeface="BIZ UDPゴシック"/>
+                <a:ea typeface="BIZ UDPゴシック"/>
+                <a:cs typeface="BIZ UDPゴシック"/>
               </a:rPr>
               <a:t>12/21〜</a:t>
             </a:r>
@@ -8980,6 +9280,9 @@
                 <a:solidFill>
                   <a:srgbClr val="24303F"/>
                 </a:solidFill>
+                <a:latin typeface="BIZ UDPゴシック"/>
+                <a:ea typeface="BIZ UDPゴシック"/>
+                <a:cs typeface="BIZ UDPゴシック"/>
               </a:rPr>
               <a:t>修論の執筆を開始</a:t>
             </a:r>
@@ -9129,6 +9432,9 @@
                 <a:solidFill>
                   <a:srgbClr val="E8457C"/>
                 </a:solidFill>
+                <a:latin typeface="BIZ UDPゴシック"/>
+                <a:ea typeface="BIZ UDPゴシック"/>
+                <a:cs typeface="BIZ UDPゴシック"/>
               </a:rPr>
               <a:t>相談したいこと</a:t>
             </a:r>
@@ -9168,6 +9474,9 @@
                 <a:solidFill>
                   <a:srgbClr val="0B3C6E"/>
                 </a:solidFill>
+                <a:latin typeface="BIZ UDPゴシック"/>
+                <a:ea typeface="BIZ UDPゴシック"/>
+                <a:cs typeface="BIZ UDPゴシック"/>
               </a:rPr>
               <a:t>ミラーを非表示にした人の扱い</a:t>
             </a:r>
@@ -9184,6 +9493,9 @@
                 <a:solidFill>
                   <a:srgbClr val="24303F"/>
                 </a:solidFill>
+                <a:latin typeface="BIZ UDPゴシック"/>
+                <a:ea typeface="BIZ UDPゴシック"/>
+                <a:cs typeface="BIZ UDPゴシック"/>
               </a:rPr>
               <a:t>主解析は ITT。非表示の人を除いた感度分析も示すか</a:t>
             </a:r>
@@ -9200,6 +9512,9 @@
                 <a:solidFill>
                   <a:srgbClr val="0B3C6E"/>
                 </a:solidFill>
+                <a:latin typeface="BIZ UDPゴシック"/>
+                <a:ea typeface="BIZ UDPゴシック"/>
+                <a:cs typeface="BIZ UDPゴシック"/>
               </a:rPr>
               <a:t>記録率の差が出てきた場合</a:t>
             </a:r>
@@ -9216,6 +9531,9 @@
                 <a:solidFill>
                   <a:srgbClr val="24303F"/>
                 </a:solidFill>
+                <a:latin typeface="BIZ UDPゴシック"/>
+                <a:ea typeface="BIZ UDPゴシック"/>
+                <a:cs typeface="BIZ UDPゴシック"/>
               </a:rPr>
               <a:t>欠測が群で偏ると主要解析に影響。多重代入の結果を本文に並べるか</a:t>
             </a:r>
@@ -9365,6 +9683,9 @@
                 <a:solidFill>
                   <a:srgbClr val="0B3C6E"/>
                 </a:solidFill>
+                <a:latin typeface="BIZ UDPゴシック"/>
+                <a:ea typeface="BIZ UDPゴシック"/>
+                <a:cs typeface="BIZ UDPゴシック"/>
               </a:rPr>
               <a:t>次回（12/18）に見せるもの</a:t>
             </a:r>
@@ -9381,6 +9702,9 @@
                 <a:solidFill>
                   <a:srgbClr val="24303F"/>
                 </a:solidFill>
+                <a:latin typeface="BIZ UDPゴシック"/>
+                <a:ea typeface="BIZ UDPゴシック"/>
+                <a:cs typeface="BIZ UDPゴシック"/>
               </a:rPr>
               <a:t>RQ1〜3 の主要な結果（速報）／脱落と記録率／アバターの評価／修論の章立て</a:t>
             </a:r>
@@ -9433,6 +9757,9 @@
                 <a:solidFill>
                   <a:srgbClr val="24303F"/>
                 </a:solidFill>
+                <a:latin typeface="BIZ UDPゴシック"/>
+                <a:ea typeface="BIZ UDPゴシック"/>
+                <a:cs typeface="BIZ UDPゴシック"/>
               </a:rPr>
               <a:t>前回（10/30）からの進捗サマリー</a:t>
             </a:r>
@@ -9451,9 +9778,14 @@
         </p:nvSpPr>
         <p:spPr/>
         <p:txBody>
-          <a:bodyPr/>
-          <a:p>
-            <a:r>
+          <a:bodyPr lIns="27432" rIns="0" wrap="none"/>
+          <a:p>
+            <a:r>
+              <a:rPr sz="900">
+                <a:latin typeface="BIZ UDPゴシック"/>
+                <a:ea typeface="BIZ UDPゴシック"/>
+                <a:cs typeface="BIZ UDPゴシック"/>
+              </a:rPr>
               <a:t>2026/11/27</a:t>
             </a:r>
           </a:p>
@@ -9474,7 +9806,11 @@
           <a:bodyPr/>
           <a:p>
             <a:fld id="{B6F15528-21DE-4FAA-801E-634DDDAF4B2B}" type="slidenum">
-              <a:rPr lang="en-US"/>
+              <a:rPr lang="en-US">
+                <a:latin typeface="BIZ UDPゴシック"/>
+                <a:ea typeface="BIZ UDPゴシック"/>
+                <a:cs typeface="BIZ UDPゴシック"/>
+              </a:rPr>
               <a:t>2</a:t>
             </a:fld>
           </a:p>
@@ -9535,6 +9871,9 @@
                 <a:solidFill>
                   <a:srgbClr val="FFFFFF"/>
                 </a:solidFill>
+                <a:latin typeface="BIZ UDPゴシック"/>
+                <a:ea typeface="BIZ UDPゴシック"/>
+                <a:cs typeface="BIZ UDPゴシック"/>
               </a:rPr>
               <a:t>完了</a:t>
             </a:r>
@@ -9574,6 +9913,9 @@
                 <a:solidFill>
                   <a:srgbClr val="0B3C6E"/>
                 </a:solidFill>
+                <a:latin typeface="BIZ UDPゴシック"/>
+                <a:ea typeface="BIZ UDPゴシック"/>
+                <a:cs typeface="BIZ UDPゴシック"/>
               </a:rPr>
               <a:t>本実験を開始（11/2・228名）</a:t>
             </a:r>
@@ -9590,6 +9932,9 @@
                 <a:solidFill>
                   <a:srgbClr val="5A6676"/>
                 </a:solidFill>
+                <a:latin typeface="BIZ UDPゴシック"/>
+                <a:ea typeface="BIZ UDPゴシック"/>
+                <a:cs typeface="BIZ UDPゴシック"/>
               </a:rPr>
               <a:t>応募241名のうち同意233名。目標240名にはわずかに届かず</a:t>
             </a:r>
@@ -9651,6 +9996,9 @@
                 <a:solidFill>
                   <a:srgbClr val="FFFFFF"/>
                 </a:solidFill>
+                <a:latin typeface="BIZ UDPゴシック"/>
+                <a:ea typeface="BIZ UDPゴシック"/>
+                <a:cs typeface="BIZ UDPゴシック"/>
               </a:rPr>
               <a:t>完了</a:t>
             </a:r>
@@ -9690,6 +10038,9 @@
                 <a:solidFill>
                   <a:srgbClr val="0B3C6E"/>
                 </a:solidFill>
+                <a:latin typeface="BIZ UDPゴシック"/>
+                <a:ea typeface="BIZ UDPゴシック"/>
+                <a:cs typeface="BIZ UDPゴシック"/>
               </a:rPr>
               <a:t>2週間の記録期間（全群：記録のみ）</a:t>
             </a:r>
@@ -9706,6 +10057,9 @@
                 <a:solidFill>
                   <a:srgbClr val="5A6676"/>
                 </a:solidFill>
+                <a:latin typeface="BIZ UDPゴシック"/>
+                <a:ea typeface="BIZ UDPゴシック"/>
+                <a:cs typeface="BIZ UDPゴシック"/>
               </a:rPr>
               <a:t>平均記録率 89%、1回の記録は平均31秒</a:t>
             </a:r>
@@ -9767,6 +10121,9 @@
                 <a:solidFill>
                   <a:srgbClr val="FFFFFF"/>
                 </a:solidFill>
+                <a:latin typeface="BIZ UDPゴシック"/>
+                <a:ea typeface="BIZ UDPゴシック"/>
+                <a:cs typeface="BIZ UDPゴシック"/>
               </a:rPr>
               <a:t>完了</a:t>
             </a:r>
@@ -9806,6 +10163,9 @@
                 <a:solidFill>
                   <a:srgbClr val="0B3C6E"/>
                 </a:solidFill>
+                <a:latin typeface="BIZ UDPゴシック"/>
+                <a:ea typeface="BIZ UDPゴシック"/>
+                <a:cs typeface="BIZ UDPゴシック"/>
               </a:rPr>
               <a:t>解析計画書を版固定（11/14）</a:t>
             </a:r>
@@ -9822,6 +10182,9 @@
                 <a:solidFill>
                   <a:srgbClr val="5A6676"/>
                 </a:solidFill>
+                <a:latin typeface="BIZ UDPゴシック"/>
+                <a:ea typeface="BIZ UDPゴシック"/>
+                <a:cs typeface="BIZ UDPゴシック"/>
               </a:rPr>
               <a:t>割付の前日に固定。主要な解析・補正方法・欠測の扱いを明記</a:t>
             </a:r>
@@ -9883,6 +10246,9 @@
                 <a:solidFill>
                   <a:srgbClr val="FFFFFF"/>
                 </a:solidFill>
+                <a:latin typeface="BIZ UDPゴシック"/>
+                <a:ea typeface="BIZ UDPゴシック"/>
+                <a:cs typeface="BIZ UDPゴシック"/>
               </a:rPr>
               <a:t>完了</a:t>
             </a:r>
@@ -9922,6 +10288,9 @@
                 <a:solidFill>
                   <a:srgbClr val="0B3C6E"/>
                 </a:solidFill>
+                <a:latin typeface="BIZ UDPゴシック"/>
+                <a:ea typeface="BIZ UDPゴシック"/>
+                <a:cs typeface="BIZ UDPゴシック"/>
               </a:rPr>
               <a:t>WHO-5 で層別して3群に割付（11/15・213名）</a:t>
             </a:r>
@@ -9938,6 +10307,9 @@
                 <a:solidFill>
                   <a:srgbClr val="5A6676"/>
                 </a:solidFill>
+                <a:latin typeface="BIZ UDPゴシック"/>
+                <a:ea typeface="BIZ UDPゴシック"/>
+                <a:cs typeface="BIZ UDPゴシック"/>
               </a:rPr>
               <a:t>各群71名。年齢・WHO-5 などのバランスは良好</a:t>
             </a:r>
@@ -9999,6 +10371,9 @@
                 <a:solidFill>
                   <a:srgbClr val="FFFFFF"/>
                 </a:solidFill>
+                <a:latin typeface="BIZ UDPゴシック"/>
+                <a:ea typeface="BIZ UDPゴシック"/>
+                <a:cs typeface="BIZ UDPゴシック"/>
               </a:rPr>
               <a:t>進行中</a:t>
             </a:r>
@@ -10038,6 +10413,9 @@
                 <a:solidFill>
                   <a:srgbClr val="0B3C6E"/>
                 </a:solidFill>
+                <a:latin typeface="BIZ UDPゴシック"/>
+                <a:ea typeface="BIZ UDPゴシック"/>
+                <a:cs typeface="BIZ UDPゴシック"/>
               </a:rPr>
               <a:t>介入期間（11/16〜12/13）</a:t>
             </a:r>
@@ -10054,6 +10432,9 @@
                 <a:solidFill>
                   <a:srgbClr val="5A6676"/>
                 </a:solidFill>
+                <a:latin typeface="BIZ UDPゴシック"/>
+                <a:ea typeface="BIZ UDPゴシック"/>
+                <a:cs typeface="BIZ UDPゴシック"/>
               </a:rPr>
               <a:t>現在2週目。提案は毎週日曜21時に配信</a:t>
             </a:r>
@@ -10115,6 +10496,9 @@
                 <a:solidFill>
                   <a:srgbClr val="FFFFFF"/>
                 </a:solidFill>
+                <a:latin typeface="BIZ UDPゴシック"/>
+                <a:ea typeface="BIZ UDPゴシック"/>
+                <a:cs typeface="BIZ UDPゴシック"/>
               </a:rPr>
               <a:t>継続</a:t>
             </a:r>
@@ -10154,6 +10538,9 @@
                 <a:solidFill>
                   <a:srgbClr val="0B3C6E"/>
                 </a:solidFill>
+                <a:latin typeface="BIZ UDPゴシック"/>
+                <a:ea typeface="BIZ UDPゴシック"/>
+                <a:cs typeface="BIZ UDPゴシック"/>
               </a:rPr>
               <a:t>全群共通の不具合を1件修正（11/18）</a:t>
             </a:r>
@@ -10170,6 +10557,9 @@
                 <a:solidFill>
                   <a:srgbClr val="5A6676"/>
                 </a:solidFill>
+                <a:latin typeface="BIZ UDPゴシック"/>
+                <a:ea typeface="BIZ UDPゴシック"/>
+                <a:cs typeface="BIZ UDPゴシック"/>
               </a:rPr>
               <a:t>Android で通知が遅れる問題。逸脱として記録済み</a:t>
             </a:r>
@@ -10233,6 +10623,9 @@
                 <a:solidFill>
                   <a:srgbClr val="E8457C"/>
                 </a:solidFill>
+                <a:latin typeface="BIZ UDPゴシック"/>
+                <a:ea typeface="BIZ UDPゴシック"/>
+                <a:cs typeface="BIZ UDPゴシック"/>
               </a:rPr>
               <a:t>※ 人数・割合は想定値</a:t>
             </a:r>
@@ -10285,6 +10678,9 @@
                 <a:solidFill>
                   <a:srgbClr val="24303F"/>
                 </a:solidFill>
+                <a:latin typeface="BIZ UDPゴシック"/>
+                <a:ea typeface="BIZ UDPゴシック"/>
+                <a:cs typeface="BIZ UDPゴシック"/>
               </a:rPr>
               <a:t>全体スケジュールと現在地</a:t>
             </a:r>
@@ -10303,9 +10699,14 @@
         </p:nvSpPr>
         <p:spPr/>
         <p:txBody>
-          <a:bodyPr/>
-          <a:p>
-            <a:r>
+          <a:bodyPr lIns="27432" rIns="0" wrap="none"/>
+          <a:p>
+            <a:r>
+              <a:rPr sz="900">
+                <a:latin typeface="BIZ UDPゴシック"/>
+                <a:ea typeface="BIZ UDPゴシック"/>
+                <a:cs typeface="BIZ UDPゴシック"/>
+              </a:rPr>
               <a:t>2026/11/27</a:t>
             </a:r>
           </a:p>
@@ -10326,7 +10727,11 @@
           <a:bodyPr/>
           <a:p>
             <a:fld id="{B6F15528-21DE-4FAA-801E-634DDDAF4B2B}" type="slidenum">
-              <a:rPr lang="en-US"/>
+              <a:rPr lang="en-US">
+                <a:latin typeface="BIZ UDPゴシック"/>
+                <a:ea typeface="BIZ UDPゴシック"/>
+                <a:cs typeface="BIZ UDPゴシック"/>
+              </a:rPr>
               <a:t>3</a:t>
             </a:fld>
           </a:p>
@@ -10365,6 +10770,9 @@
                 <a:solidFill>
                   <a:srgbClr val="5A6676"/>
                 </a:solidFill>
+                <a:latin typeface="BIZ UDPゴシック"/>
+                <a:ea typeface="BIZ UDPゴシック"/>
+                <a:cs typeface="BIZ UDPゴシック"/>
               </a:rPr>
               <a:t>10月</a:t>
             </a:r>
@@ -10439,6 +10847,9 @@
                 <a:solidFill>
                   <a:srgbClr val="5A6676"/>
                 </a:solidFill>
+                <a:latin typeface="BIZ UDPゴシック"/>
+                <a:ea typeface="BIZ UDPゴシック"/>
+                <a:cs typeface="BIZ UDPゴシック"/>
               </a:rPr>
               <a:t>11月</a:t>
             </a:r>
@@ -10513,6 +10924,9 @@
                 <a:solidFill>
                   <a:srgbClr val="5A6676"/>
                 </a:solidFill>
+                <a:latin typeface="BIZ UDPゴシック"/>
+                <a:ea typeface="BIZ UDPゴシック"/>
+                <a:cs typeface="BIZ UDPゴシック"/>
               </a:rPr>
               <a:t>12月</a:t>
             </a:r>
@@ -10587,6 +11001,9 @@
                 <a:solidFill>
                   <a:srgbClr val="5A6676"/>
                 </a:solidFill>
+                <a:latin typeface="BIZ UDPゴシック"/>
+                <a:ea typeface="BIZ UDPゴシック"/>
+                <a:cs typeface="BIZ UDPゴシック"/>
               </a:rPr>
               <a:t>1月</a:t>
             </a:r>
@@ -10661,6 +11078,9 @@
                 <a:solidFill>
                   <a:srgbClr val="5A6676"/>
                 </a:solidFill>
+                <a:latin typeface="BIZ UDPゴシック"/>
+                <a:ea typeface="BIZ UDPゴシック"/>
+                <a:cs typeface="BIZ UDPゴシック"/>
               </a:rPr>
               <a:t>2月</a:t>
             </a:r>
@@ -10735,6 +11155,9 @@
                 <a:solidFill>
                   <a:srgbClr val="5A6676"/>
                 </a:solidFill>
+                <a:latin typeface="BIZ UDPゴシック"/>
+                <a:ea typeface="BIZ UDPゴシック"/>
+                <a:cs typeface="BIZ UDPゴシック"/>
               </a:rPr>
               <a:t>3月</a:t>
             </a:r>
@@ -10809,6 +11232,9 @@
                 <a:solidFill>
                   <a:srgbClr val="0B3C6E"/>
                 </a:solidFill>
+                <a:latin typeface="BIZ UDPゴシック"/>
+                <a:ea typeface="BIZ UDPゴシック"/>
+                <a:cs typeface="BIZ UDPゴシック"/>
               </a:rPr>
               <a:t>システム開発</a:t>
             </a:r>
@@ -10936,8 +11362,11 @@
                 <a:solidFill>
                   <a:srgbClr val="FFFFFF"/>
                 </a:solidFill>
+                <a:latin typeface="BIZ UDPゴシック"/>
+                <a:ea typeface="BIZ UDPゴシック"/>
+                <a:cs typeface="BIZ UDPゴシック"/>
               </a:rPr>
-              <a:t>設計 → β版</a:t>
+              <a:t>設計 → ベータ版</a:t>
             </a:r>
           </a:p>
         </p:txBody>
@@ -10975,6 +11404,9 @@
                 <a:solidFill>
                   <a:srgbClr val="0B3C6E"/>
                 </a:solidFill>
+                <a:latin typeface="BIZ UDPゴシック"/>
+                <a:ea typeface="BIZ UDPゴシック"/>
+                <a:cs typeface="BIZ UDPゴシック"/>
               </a:rPr>
               <a:t>倫理審査・募集</a:t>
             </a:r>
@@ -11102,6 +11534,9 @@
                 <a:solidFill>
                   <a:srgbClr val="FFFFFF"/>
                 </a:solidFill>
+                <a:latin typeface="BIZ UDPゴシック"/>
+                <a:ea typeface="BIZ UDPゴシック"/>
+                <a:cs typeface="BIZ UDPゴシック"/>
               </a:rPr>
               <a:t>審査</a:t>
             </a:r>
@@ -11229,6 +11664,9 @@
                 <a:solidFill>
                   <a:srgbClr val="FFFFFF"/>
                 </a:solidFill>
+                <a:latin typeface="BIZ UDPゴシック"/>
+                <a:ea typeface="BIZ UDPゴシック"/>
+                <a:cs typeface="BIZ UDPゴシック"/>
               </a:rPr>
               <a:t>募集</a:t>
             </a:r>
@@ -11268,6 +11706,9 @@
                 <a:solidFill>
                   <a:srgbClr val="0B3C6E"/>
                 </a:solidFill>
+                <a:latin typeface="BIZ UDPゴシック"/>
+                <a:ea typeface="BIZ UDPゴシック"/>
+                <a:cs typeface="BIZ UDPゴシック"/>
               </a:rPr>
               <a:t>本実験（6週間）</a:t>
             </a:r>
@@ -11395,6 +11836,9 @@
                 <a:solidFill>
                   <a:srgbClr val="FFFFFF"/>
                 </a:solidFill>
+                <a:latin typeface="BIZ UDPゴシック"/>
+                <a:ea typeface="BIZ UDPゴシック"/>
+                <a:cs typeface="BIZ UDPゴシック"/>
               </a:rPr>
               <a:t>記録のみ</a:t>
             </a:r>
@@ -11522,6 +11966,9 @@
                 <a:solidFill>
                   <a:srgbClr val="0B3C6E"/>
                 </a:solidFill>
+                <a:latin typeface="BIZ UDPゴシック"/>
+                <a:ea typeface="BIZ UDPゴシック"/>
+                <a:cs typeface="BIZ UDPゴシック"/>
               </a:rPr>
               <a:t>介入（3群）</a:t>
             </a:r>
@@ -11561,6 +12008,9 @@
                 <a:solidFill>
                   <a:srgbClr val="0B3C6E"/>
                 </a:solidFill>
+                <a:latin typeface="BIZ UDPゴシック"/>
+                <a:ea typeface="BIZ UDPゴシック"/>
+                <a:cs typeface="BIZ UDPゴシック"/>
               </a:rPr>
               <a:t>解析・修論</a:t>
             </a:r>
@@ -11644,6 +12094,9 @@
                 <a:solidFill>
                   <a:srgbClr val="0B3C6E"/>
                 </a:solidFill>
+                <a:latin typeface="BIZ UDPゴシック"/>
+                <a:ea typeface="BIZ UDPゴシック"/>
+                <a:cs typeface="BIZ UDPゴシック"/>
               </a:rPr>
               <a:t>解析 → 執筆</a:t>
             </a:r>
@@ -11683,6 +12136,9 @@
                 <a:solidFill>
                   <a:srgbClr val="0B3C6E"/>
                 </a:solidFill>
+                <a:latin typeface="BIZ UDPゴシック"/>
+                <a:ea typeface="BIZ UDPゴシック"/>
+                <a:cs typeface="BIZ UDPゴシック"/>
               </a:rPr>
               <a:t>対外発表</a:t>
             </a:r>
@@ -11766,6 +12222,9 @@
                 <a:solidFill>
                   <a:srgbClr val="24303F"/>
                 </a:solidFill>
+                <a:latin typeface="BIZ UDPゴシック"/>
+                <a:ea typeface="BIZ UDPゴシック"/>
+                <a:cs typeface="BIZ UDPゴシック"/>
               </a:rPr>
               <a:t>CHIIR投稿</a:t>
             </a:r>
@@ -11782,6 +12241,9 @@
                 <a:solidFill>
                   <a:srgbClr val="24303F"/>
                 </a:solidFill>
+                <a:latin typeface="BIZ UDPゴシック"/>
+                <a:ea typeface="BIZ UDPゴシック"/>
+                <a:cs typeface="BIZ UDPゴシック"/>
               </a:rPr>
               <a:t>10/29</a:t>
             </a:r>
@@ -11865,6 +12327,9 @@
                 <a:solidFill>
                   <a:srgbClr val="24303F"/>
                 </a:solidFill>
+                <a:latin typeface="BIZ UDPゴシック"/>
+                <a:ea typeface="BIZ UDPゴシック"/>
+                <a:cs typeface="BIZ UDPゴシック"/>
               </a:rPr>
               <a:t>修論提出</a:t>
             </a:r>
@@ -11881,6 +12346,9 @@
                 <a:solidFill>
                   <a:srgbClr val="24303F"/>
                 </a:solidFill>
+                <a:latin typeface="BIZ UDPゴシック"/>
+                <a:ea typeface="BIZ UDPゴシック"/>
+                <a:cs typeface="BIZ UDPゴシック"/>
               </a:rPr>
               <a:t>1/29</a:t>
             </a:r>
@@ -11964,6 +12432,9 @@
                 <a:solidFill>
                   <a:srgbClr val="24303F"/>
                 </a:solidFill>
+                <a:latin typeface="BIZ UDPゴシック"/>
+                <a:ea typeface="BIZ UDPゴシック"/>
+                <a:cs typeface="BIZ UDPゴシック"/>
               </a:rPr>
               <a:t>公聴会</a:t>
             </a:r>
@@ -11980,6 +12451,9 @@
                 <a:solidFill>
                   <a:srgbClr val="24303F"/>
                 </a:solidFill>
+                <a:latin typeface="BIZ UDPゴシック"/>
+                <a:ea typeface="BIZ UDPゴシック"/>
+                <a:cs typeface="BIZ UDPゴシック"/>
               </a:rPr>
               <a:t>2/17</a:t>
             </a:r>
@@ -12063,6 +12537,9 @@
                 <a:solidFill>
                   <a:srgbClr val="24303F"/>
                 </a:solidFill>
+                <a:latin typeface="BIZ UDPゴシック"/>
+                <a:ea typeface="BIZ UDPゴシック"/>
+                <a:cs typeface="BIZ UDPゴシック"/>
               </a:rPr>
               <a:t>CHIIR</a:t>
             </a:r>
@@ -12079,6 +12556,9 @@
                 <a:solidFill>
                   <a:srgbClr val="24303F"/>
                 </a:solidFill>
+                <a:latin typeface="BIZ UDPゴシック"/>
+                <a:ea typeface="BIZ UDPゴシック"/>
+                <a:cs typeface="BIZ UDPゴシック"/>
               </a:rPr>
               <a:t>3/7–11</a:t>
             </a:r>
@@ -12176,6 +12656,9 @@
                 <a:solidFill>
                   <a:srgbClr val="FFFFFF"/>
                 </a:solidFill>
+                <a:latin typeface="BIZ UDPゴシック"/>
+                <a:ea typeface="BIZ UDPゴシック"/>
+                <a:cs typeface="BIZ UDPゴシック"/>
               </a:rPr>
               <a:t>いまここ 11/27</a:t>
             </a:r>
@@ -12325,6 +12808,9 @@
                 <a:solidFill>
                   <a:srgbClr val="0B3C6E"/>
                 </a:solidFill>
+                <a:latin typeface="BIZ UDPゴシック"/>
+                <a:ea typeface="BIZ UDPゴシック"/>
+                <a:cs typeface="BIZ UDPゴシック"/>
               </a:rPr>
               <a:t>本実験は6週間のうち4週目。予定どおり 12/13 に終了する見込み</a:t>
             </a:r>
@@ -12341,6 +12827,9 @@
                 <a:solidFill>
                   <a:srgbClr val="5A6676"/>
                 </a:solidFill>
+                <a:latin typeface="BIZ UDPゴシック"/>
+                <a:ea typeface="BIZ UDPゴシック"/>
+                <a:cs typeface="BIZ UDPゴシック"/>
               </a:rPr>
               <a:t>前回（10/30）から：募集 → 記録のみ期間 → 割付 → 介入開始まで進んだ</a:t>
             </a:r>
@@ -12393,6 +12882,9 @@
                 <a:solidFill>
                   <a:srgbClr val="24303F"/>
                 </a:solidFill>
+                <a:latin typeface="BIZ UDPゴシック"/>
+                <a:ea typeface="BIZ UDPゴシック"/>
+                <a:cs typeface="BIZ UDPゴシック"/>
               </a:rPr>
               <a:t>参加者の流れ</a:t>
             </a:r>
@@ -12411,9 +12903,14 @@
         </p:nvSpPr>
         <p:spPr/>
         <p:txBody>
-          <a:bodyPr/>
-          <a:p>
-            <a:r>
+          <a:bodyPr lIns="27432" rIns="0" wrap="none"/>
+          <a:p>
+            <a:r>
+              <a:rPr sz="900">
+                <a:latin typeface="BIZ UDPゴシック"/>
+                <a:ea typeface="BIZ UDPゴシック"/>
+                <a:cs typeface="BIZ UDPゴシック"/>
+              </a:rPr>
               <a:t>2026/11/27</a:t>
             </a:r>
           </a:p>
@@ -12434,7 +12931,11 @@
           <a:bodyPr/>
           <a:p>
             <a:fld id="{B6F15528-21DE-4FAA-801E-634DDDAF4B2B}" type="slidenum">
-              <a:rPr lang="en-US"/>
+              <a:rPr lang="en-US">
+                <a:latin typeface="BIZ UDPゴシック"/>
+                <a:ea typeface="BIZ UDPゴシック"/>
+                <a:cs typeface="BIZ UDPゴシック"/>
+              </a:rPr>
               <a:t>4</a:t>
             </a:fld>
           </a:p>
@@ -12517,6 +13018,9 @@
                 <a:solidFill>
                   <a:srgbClr val="0B3C6E"/>
                 </a:solidFill>
+                <a:latin typeface="BIZ UDPゴシック"/>
+                <a:ea typeface="BIZ UDPゴシック"/>
+                <a:cs typeface="BIZ UDPゴシック"/>
               </a:rPr>
               <a:t>応募</a:t>
             </a:r>
@@ -12556,6 +13060,9 @@
                 <a:solidFill>
                   <a:srgbClr val="0B3C6E"/>
                 </a:solidFill>
+                <a:latin typeface="BIZ UDPゴシック"/>
+                <a:ea typeface="BIZ UDPゴシック"/>
+                <a:cs typeface="BIZ UDPゴシック"/>
               </a:rPr>
               <a:t>241名</a:t>
             </a:r>
@@ -12681,6 +13188,9 @@
                 <a:solidFill>
                   <a:srgbClr val="0B3C6E"/>
                 </a:solidFill>
+                <a:latin typeface="BIZ UDPゴシック"/>
+                <a:ea typeface="BIZ UDPゴシック"/>
+                <a:cs typeface="BIZ UDPゴシック"/>
               </a:rPr>
               <a:t>同意・適格</a:t>
             </a:r>
@@ -12720,6 +13230,9 @@
                 <a:solidFill>
                   <a:srgbClr val="0B3C6E"/>
                 </a:solidFill>
+                <a:latin typeface="BIZ UDPゴシック"/>
+                <a:ea typeface="BIZ UDPゴシック"/>
+                <a:cs typeface="BIZ UDPゴシック"/>
               </a:rPr>
               <a:t>233名</a:t>
             </a:r>
@@ -12845,6 +13358,9 @@
                 <a:solidFill>
                   <a:srgbClr val="0B3C6E"/>
                 </a:solidFill>
+                <a:latin typeface="BIZ UDPゴシック"/>
+                <a:ea typeface="BIZ UDPゴシック"/>
+                <a:cs typeface="BIZ UDPゴシック"/>
               </a:rPr>
               <a:t>開始（11/2）</a:t>
             </a:r>
@@ -12884,6 +13400,9 @@
                 <a:solidFill>
                   <a:srgbClr val="0B3C6E"/>
                 </a:solidFill>
+                <a:latin typeface="BIZ UDPゴシック"/>
+                <a:ea typeface="BIZ UDPゴシック"/>
+                <a:cs typeface="BIZ UDPゴシック"/>
               </a:rPr>
               <a:t>228名</a:t>
             </a:r>
@@ -13009,6 +13528,9 @@
                 <a:solidFill>
                   <a:srgbClr val="FFFFFF"/>
                 </a:solidFill>
+                <a:latin typeface="BIZ UDPゴシック"/>
+                <a:ea typeface="BIZ UDPゴシック"/>
+                <a:cs typeface="BIZ UDPゴシック"/>
               </a:rPr>
               <a:t>2週継続（11/15）</a:t>
             </a:r>
@@ -13048,6 +13570,9 @@
                 <a:solidFill>
                   <a:srgbClr val="FFFFFF"/>
                 </a:solidFill>
+                <a:latin typeface="BIZ UDPゴシック"/>
+                <a:ea typeface="BIZ UDPゴシック"/>
+                <a:cs typeface="BIZ UDPゴシック"/>
               </a:rPr>
               <a:t>213名</a:t>
             </a:r>
@@ -13131,6 +13656,9 @@
                 <a:solidFill>
                   <a:srgbClr val="E07A10"/>
                 </a:solidFill>
+                <a:latin typeface="BIZ UDPゴシック"/>
+                <a:ea typeface="BIZ UDPゴシック"/>
+                <a:cs typeface="BIZ UDPゴシック"/>
               </a:rPr>
               <a:t>除外 8名</a:t>
             </a:r>
@@ -13147,6 +13675,9 @@
                 <a:solidFill>
                   <a:srgbClr val="5A6676"/>
                 </a:solidFill>
+                <a:latin typeface="BIZ UDPゴシック"/>
+                <a:ea typeface="BIZ UDPゴシック"/>
+                <a:cs typeface="BIZ UDPゴシック"/>
               </a:rPr>
               <a:t>推し活なし3・未成年2・撤回3</a:t>
             </a:r>
@@ -13230,6 +13761,9 @@
                 <a:solidFill>
                   <a:srgbClr val="E07A10"/>
                 </a:solidFill>
+                <a:latin typeface="BIZ UDPゴシック"/>
+                <a:ea typeface="BIZ UDPゴシック"/>
+                <a:cs typeface="BIZ UDPゴシック"/>
               </a:rPr>
               <a:t>未開始 5名</a:t>
             </a:r>
@@ -13246,6 +13780,9 @@
                 <a:solidFill>
                   <a:srgbClr val="5A6676"/>
                 </a:solidFill>
+                <a:latin typeface="BIZ UDPゴシック"/>
+                <a:ea typeface="BIZ UDPゴシック"/>
+                <a:cs typeface="BIZ UDPゴシック"/>
               </a:rPr>
               <a:t>初回設定せず</a:t>
             </a:r>
@@ -13329,6 +13866,9 @@
                 <a:solidFill>
                   <a:srgbClr val="E07A10"/>
                 </a:solidFill>
+                <a:latin typeface="BIZ UDPゴシック"/>
+                <a:ea typeface="BIZ UDPゴシック"/>
+                <a:cs typeface="BIZ UDPゴシック"/>
               </a:rPr>
               <a:t>脱落 15名</a:t>
             </a:r>
@@ -13345,6 +13885,9 @@
                 <a:solidFill>
                   <a:srgbClr val="5A6676"/>
                 </a:solidFill>
+                <a:latin typeface="BIZ UDPゴシック"/>
+                <a:ea typeface="BIZ UDPゴシック"/>
+                <a:cs typeface="BIZ UDPゴシック"/>
               </a:rPr>
               <a:t>記録が7日以上途絶</a:t>
             </a:r>
@@ -13534,6 +14077,9 @@
                 <a:solidFill>
                   <a:srgbClr val="7A8594"/>
                 </a:solidFill>
+                <a:latin typeface="BIZ UDPゴシック"/>
+                <a:ea typeface="BIZ UDPゴシック"/>
+                <a:cs typeface="BIZ UDPゴシック"/>
               </a:rPr>
               <a:t>群A 記録のみ</a:t>
             </a:r>
@@ -13573,6 +14119,9 @@
                 <a:solidFill>
                   <a:srgbClr val="0B3C6E"/>
                 </a:solidFill>
+                <a:latin typeface="BIZ UDPゴシック"/>
+                <a:ea typeface="BIZ UDPゴシック"/>
+                <a:cs typeface="BIZ UDPゴシック"/>
               </a:rPr>
               <a:t>71名</a:t>
             </a:r>
@@ -13612,6 +14161,9 @@
                 <a:solidFill>
                   <a:srgbClr val="5A6676"/>
                 </a:solidFill>
+                <a:latin typeface="BIZ UDPゴシック"/>
+                <a:ea typeface="BIZ UDPゴシック"/>
+                <a:cs typeface="BIZ UDPゴシック"/>
               </a:rPr>
               <a:t>割付（11/15）</a:t>
             </a:r>
@@ -13651,6 +14203,9 @@
                 <a:solidFill>
                   <a:srgbClr val="24303F"/>
                 </a:solidFill>
+                <a:latin typeface="BIZ UDPゴシック"/>
+                <a:ea typeface="BIZ UDPゴシック"/>
+                <a:cs typeface="BIZ UDPゴシック"/>
               </a:rPr>
               <a:t>現在の継続：69名</a:t>
             </a:r>
@@ -13770,6 +14325,9 @@
                 <a:solidFill>
                   <a:srgbClr val="0099FF"/>
                 </a:solidFill>
+                <a:latin typeface="BIZ UDPゴシック"/>
+                <a:ea typeface="BIZ UDPゴシック"/>
+                <a:cs typeface="BIZ UDPゴシック"/>
               </a:rPr>
               <a:t>群B 提案（文章）</a:t>
             </a:r>
@@ -13809,6 +14367,9 @@
                 <a:solidFill>
                   <a:srgbClr val="0B3C6E"/>
                 </a:solidFill>
+                <a:latin typeface="BIZ UDPゴシック"/>
+                <a:ea typeface="BIZ UDPゴシック"/>
+                <a:cs typeface="BIZ UDPゴシック"/>
               </a:rPr>
               <a:t>71名</a:t>
             </a:r>
@@ -13848,6 +14409,9 @@
                 <a:solidFill>
                   <a:srgbClr val="5A6676"/>
                 </a:solidFill>
+                <a:latin typeface="BIZ UDPゴシック"/>
+                <a:ea typeface="BIZ UDPゴシック"/>
+                <a:cs typeface="BIZ UDPゴシック"/>
               </a:rPr>
               <a:t>割付（11/15）</a:t>
             </a:r>
@@ -13887,6 +14451,9 @@
                 <a:solidFill>
                   <a:srgbClr val="24303F"/>
                 </a:solidFill>
+                <a:latin typeface="BIZ UDPゴシック"/>
+                <a:ea typeface="BIZ UDPゴシック"/>
+                <a:cs typeface="BIZ UDPゴシック"/>
               </a:rPr>
               <a:t>現在の継続：70名</a:t>
             </a:r>
@@ -14006,6 +14573,9 @@
                 <a:solidFill>
                   <a:srgbClr val="12A38A"/>
                 </a:solidFill>
+                <a:latin typeface="BIZ UDPゴシック"/>
+                <a:ea typeface="BIZ UDPゴシック"/>
+                <a:cs typeface="BIZ UDPゴシック"/>
               </a:rPr>
               <a:t>群C 提案＋アバター</a:t>
             </a:r>
@@ -14045,6 +14615,9 @@
                 <a:solidFill>
                   <a:srgbClr val="0B3C6E"/>
                 </a:solidFill>
+                <a:latin typeface="BIZ UDPゴシック"/>
+                <a:ea typeface="BIZ UDPゴシック"/>
+                <a:cs typeface="BIZ UDPゴシック"/>
               </a:rPr>
               <a:t>71名</a:t>
             </a:r>
@@ -14084,6 +14657,9 @@
                 <a:solidFill>
                   <a:srgbClr val="5A6676"/>
                 </a:solidFill>
+                <a:latin typeface="BIZ UDPゴシック"/>
+                <a:ea typeface="BIZ UDPゴシック"/>
+                <a:cs typeface="BIZ UDPゴシック"/>
               </a:rPr>
               <a:t>割付（11/15）</a:t>
             </a:r>
@@ -14123,6 +14699,9 @@
                 <a:solidFill>
                   <a:srgbClr val="24303F"/>
                 </a:solidFill>
+                <a:latin typeface="BIZ UDPゴシック"/>
+                <a:ea typeface="BIZ UDPゴシック"/>
+                <a:cs typeface="BIZ UDPゴシック"/>
               </a:rPr>
               <a:t>現在の継続：70名</a:t>
             </a:r>
@@ -14186,6 +14765,9 @@
                 <a:solidFill>
                   <a:srgbClr val="E8457C"/>
                 </a:solidFill>
+                <a:latin typeface="BIZ UDPゴシック"/>
+                <a:ea typeface="BIZ UDPゴシック"/>
+                <a:cs typeface="BIZ UDPゴシック"/>
               </a:rPr>
               <a:t>※ 人数は想定値</a:t>
             </a:r>
@@ -14238,6 +14820,9 @@
                 <a:solidFill>
                   <a:srgbClr val="24303F"/>
                 </a:solidFill>
+                <a:latin typeface="BIZ UDPゴシック"/>
+                <a:ea typeface="BIZ UDPゴシック"/>
+                <a:cs typeface="BIZ UDPゴシック"/>
               </a:rPr>
               <a:t>最初の2週間：記録は続いたか</a:t>
             </a:r>
@@ -14256,9 +14841,14 @@
         </p:nvSpPr>
         <p:spPr/>
         <p:txBody>
-          <a:bodyPr/>
-          <a:p>
-            <a:r>
+          <a:bodyPr lIns="27432" rIns="0" wrap="none"/>
+          <a:p>
+            <a:r>
+              <a:rPr sz="900">
+                <a:latin typeface="BIZ UDPゴシック"/>
+                <a:ea typeface="BIZ UDPゴシック"/>
+                <a:cs typeface="BIZ UDPゴシック"/>
+              </a:rPr>
               <a:t>2026/11/27</a:t>
             </a:r>
           </a:p>
@@ -14279,7 +14869,11 @@
           <a:bodyPr/>
           <a:p>
             <a:fld id="{B6F15528-21DE-4FAA-801E-634DDDAF4B2B}" type="slidenum">
-              <a:rPr lang="en-US"/>
+              <a:rPr lang="en-US">
+                <a:latin typeface="BIZ UDPゴシック"/>
+                <a:ea typeface="BIZ UDPゴシック"/>
+                <a:cs typeface="BIZ UDPゴシック"/>
+              </a:rPr>
               <a:t>5</a:t>
             </a:fld>
           </a:p>
@@ -14336,6 +14930,9 @@
                 <a:solidFill>
                   <a:srgbClr val="5A6676"/>
                 </a:solidFill>
+                <a:latin typeface="BIZ UDPゴシック"/>
+                <a:ea typeface="BIZ UDPゴシック"/>
+                <a:cs typeface="BIZ UDPゴシック"/>
               </a:rPr>
               <a:t>記録開始からの日数</a:t>
             </a:r>
@@ -14427,6 +15024,9 @@
                 <a:solidFill>
                   <a:srgbClr val="0B3C6E"/>
                 </a:solidFill>
+                <a:latin typeface="BIZ UDPゴシック"/>
+                <a:ea typeface="BIZ UDPゴシック"/>
+                <a:cs typeface="BIZ UDPゴシック"/>
               </a:rPr>
               <a:t>89%</a:t>
             </a:r>
@@ -14466,6 +15066,9 @@
                 <a:solidFill>
                   <a:srgbClr val="5A6676"/>
                 </a:solidFill>
+                <a:latin typeface="BIZ UDPゴシック"/>
+                <a:ea typeface="BIZ UDPゴシック"/>
+                <a:cs typeface="BIZ UDPゴシック"/>
               </a:rPr>
               <a:t>平均の記録率</a:t>
             </a:r>
@@ -14557,6 +15160,9 @@
                 <a:solidFill>
                   <a:srgbClr val="0B3C6E"/>
                 </a:solidFill>
+                <a:latin typeface="BIZ UDPゴシック"/>
+                <a:ea typeface="BIZ UDPゴシック"/>
+                <a:cs typeface="BIZ UDPゴシック"/>
               </a:rPr>
               <a:t>31秒</a:t>
             </a:r>
@@ -14596,6 +15202,9 @@
                 <a:solidFill>
                   <a:srgbClr val="5A6676"/>
                 </a:solidFill>
+                <a:latin typeface="BIZ UDPゴシック"/>
+                <a:ea typeface="BIZ UDPゴシック"/>
+                <a:cs typeface="BIZ UDPゴシック"/>
               </a:rPr>
               <a:t>1回の記録の平均時間</a:t>
             </a:r>
@@ -14687,6 +15296,9 @@
                 <a:solidFill>
                   <a:srgbClr val="0B3C6E"/>
                 </a:solidFill>
+                <a:latin typeface="BIZ UDPゴシック"/>
+                <a:ea typeface="BIZ UDPゴシック"/>
+                <a:cs typeface="BIZ UDPゴシック"/>
               </a:rPr>
               <a:t>42%</a:t>
             </a:r>
@@ -14726,6 +15338,9 @@
                 <a:solidFill>
                   <a:srgbClr val="5A6676"/>
                 </a:solidFill>
+                <a:latin typeface="BIZ UDPゴシック"/>
+                <a:ea typeface="BIZ UDPゴシック"/>
+                <a:cs typeface="BIZ UDPゴシック"/>
               </a:rPr>
               <a:t>21時の通知の直後の記録</a:t>
             </a:r>
@@ -14787,6 +15402,9 @@
                 <a:solidFill>
                   <a:srgbClr val="E07A10"/>
                 </a:solidFill>
+                <a:latin typeface="BIZ UDPゴシック"/>
+                <a:ea typeface="BIZ UDPゴシック"/>
+                <a:cs typeface="BIZ UDPゴシック"/>
               </a:rPr>
               <a:t>記録率は1日目97% → 14日目84%。週末（6・13日目）にやや下がる。介入期間に向けて通知の時刻は変えない</a:t>
             </a:r>
@@ -14850,6 +15468,9 @@
                 <a:solidFill>
                   <a:srgbClr val="E8457C"/>
                 </a:solidFill>
+                <a:latin typeface="BIZ UDPゴシック"/>
+                <a:ea typeface="BIZ UDPゴシック"/>
+                <a:cs typeface="BIZ UDPゴシック"/>
               </a:rPr>
               <a:t>※ 想定値：実データで差し替え</a:t>
             </a:r>
@@ -14902,6 +15523,9 @@
                 <a:solidFill>
                   <a:srgbClr val="24303F"/>
                 </a:solidFill>
+                <a:latin typeface="BIZ UDPゴシック"/>
+                <a:ea typeface="BIZ UDPゴシック"/>
+                <a:cs typeface="BIZ UDPゴシック"/>
               </a:rPr>
               <a:t>割付のバランス（11/15）</a:t>
             </a:r>
@@ -14920,9 +15544,14 @@
         </p:nvSpPr>
         <p:spPr/>
         <p:txBody>
-          <a:bodyPr/>
-          <a:p>
-            <a:r>
+          <a:bodyPr lIns="27432" rIns="0" wrap="none"/>
+          <a:p>
+            <a:r>
+              <a:rPr sz="900">
+                <a:latin typeface="BIZ UDPゴシック"/>
+                <a:ea typeface="BIZ UDPゴシック"/>
+                <a:cs typeface="BIZ UDPゴシック"/>
+              </a:rPr>
               <a:t>2026/11/27</a:t>
             </a:r>
           </a:p>
@@ -14943,7 +15572,11 @@
           <a:bodyPr/>
           <a:p>
             <a:fld id="{B6F15528-21DE-4FAA-801E-634DDDAF4B2B}" type="slidenum">
-              <a:rPr lang="en-US"/>
+              <a:rPr lang="en-US">
+                <a:latin typeface="BIZ UDPゴシック"/>
+                <a:ea typeface="BIZ UDPゴシック"/>
+                <a:cs typeface="BIZ UDPゴシック"/>
+              </a:rPr>
               <a:t>6</a:t>
             </a:fld>
           </a:p>
@@ -15033,6 +15666,9 @@
                           <a:solidFill>
                             <a:srgbClr val="FFFFFF"/>
                           </a:solidFill>
+                          <a:latin typeface="BIZ UDPゴシック"/>
+                          <a:ea typeface="BIZ UDPゴシック"/>
+                          <a:cs typeface="BIZ UDPゴシック"/>
                         </a:rPr>
                         <a:t>群A 記録のみ</a:t>
                       </a:r>
@@ -15082,6 +15718,9 @@
                           <a:solidFill>
                             <a:srgbClr val="FFFFFF"/>
                           </a:solidFill>
+                          <a:latin typeface="BIZ UDPゴシック"/>
+                          <a:ea typeface="BIZ UDPゴシック"/>
+                          <a:cs typeface="BIZ UDPゴシック"/>
                         </a:rPr>
                         <a:t>群B 提案（文章）</a:t>
                       </a:r>
@@ -15131,6 +15770,9 @@
                           <a:solidFill>
                             <a:srgbClr val="FFFFFF"/>
                           </a:solidFill>
+                          <a:latin typeface="BIZ UDPゴシック"/>
+                          <a:ea typeface="BIZ UDPゴシック"/>
+                          <a:cs typeface="BIZ UDPゴシック"/>
                         </a:rPr>
                         <a:t>群C 提案＋アバター</a:t>
                       </a:r>
@@ -15182,6 +15824,9 @@
                           <a:solidFill>
                             <a:srgbClr val="24303F"/>
                           </a:solidFill>
+                          <a:latin typeface="BIZ UDPゴシック"/>
+                          <a:ea typeface="BIZ UDPゴシック"/>
+                          <a:cs typeface="BIZ UDPゴシック"/>
                         </a:rPr>
                         <a:t>人数</a:t>
                       </a:r>
@@ -15231,6 +15876,9 @@
                           <a:solidFill>
                             <a:srgbClr val="24303F"/>
                           </a:solidFill>
+                          <a:latin typeface="BIZ UDPゴシック"/>
+                          <a:ea typeface="BIZ UDPゴシック"/>
+                          <a:cs typeface="BIZ UDPゴシック"/>
                         </a:rPr>
                         <a:t>71</a:t>
                       </a:r>
@@ -15280,6 +15928,9 @@
                           <a:solidFill>
                             <a:srgbClr val="24303F"/>
                           </a:solidFill>
+                          <a:latin typeface="BIZ UDPゴシック"/>
+                          <a:ea typeface="BIZ UDPゴシック"/>
+                          <a:cs typeface="BIZ UDPゴシック"/>
                         </a:rPr>
                         <a:t>71</a:t>
                       </a:r>
@@ -15329,6 +15980,9 @@
                           <a:solidFill>
                             <a:srgbClr val="24303F"/>
                           </a:solidFill>
+                          <a:latin typeface="BIZ UDPゴシック"/>
+                          <a:ea typeface="BIZ UDPゴシック"/>
+                          <a:cs typeface="BIZ UDPゴシック"/>
                         </a:rPr>
                         <a:t>71</a:t>
                       </a:r>
@@ -15380,6 +16034,9 @@
                           <a:solidFill>
                             <a:srgbClr val="24303F"/>
                           </a:solidFill>
+                          <a:latin typeface="BIZ UDPゴシック"/>
+                          <a:ea typeface="BIZ UDPゴシック"/>
+                          <a:cs typeface="BIZ UDPゴシック"/>
                         </a:rPr>
                         <a:t>年齢（平均）</a:t>
                       </a:r>
@@ -15429,6 +16086,9 @@
                           <a:solidFill>
                             <a:srgbClr val="24303F"/>
                           </a:solidFill>
+                          <a:latin typeface="BIZ UDPゴシック"/>
+                          <a:ea typeface="BIZ UDPゴシック"/>
+                          <a:cs typeface="BIZ UDPゴシック"/>
                         </a:rPr>
                         <a:t>22.4</a:t>
                       </a:r>
@@ -15478,6 +16138,9 @@
                           <a:solidFill>
                             <a:srgbClr val="24303F"/>
                           </a:solidFill>
+                          <a:latin typeface="BIZ UDPゴシック"/>
+                          <a:ea typeface="BIZ UDPゴシック"/>
+                          <a:cs typeface="BIZ UDPゴシック"/>
                         </a:rPr>
                         <a:t>22.8</a:t>
                       </a:r>
@@ -15527,6 +16190,9 @@
                           <a:solidFill>
                             <a:srgbClr val="24303F"/>
                           </a:solidFill>
+                          <a:latin typeface="BIZ UDPゴシック"/>
+                          <a:ea typeface="BIZ UDPゴシック"/>
+                          <a:cs typeface="BIZ UDPゴシック"/>
                         </a:rPr>
                         <a:t>22.5</a:t>
                       </a:r>
@@ -15578,6 +16244,9 @@
                           <a:solidFill>
                             <a:srgbClr val="24303F"/>
                           </a:solidFill>
+                          <a:latin typeface="BIZ UDPゴシック"/>
+                          <a:ea typeface="BIZ UDPゴシック"/>
+                          <a:cs typeface="BIZ UDPゴシック"/>
                         </a:rPr>
                         <a:t>女性の割合</a:t>
                       </a:r>
@@ -15627,6 +16296,9 @@
                           <a:solidFill>
                             <a:srgbClr val="24303F"/>
                           </a:solidFill>
+                          <a:latin typeface="BIZ UDPゴシック"/>
+                          <a:ea typeface="BIZ UDPゴシック"/>
+                          <a:cs typeface="BIZ UDPゴシック"/>
                         </a:rPr>
                         <a:t>72%</a:t>
                       </a:r>
@@ -15676,6 +16348,9 @@
                           <a:solidFill>
                             <a:srgbClr val="24303F"/>
                           </a:solidFill>
+                          <a:latin typeface="BIZ UDPゴシック"/>
+                          <a:ea typeface="BIZ UDPゴシック"/>
+                          <a:cs typeface="BIZ UDPゴシック"/>
                         </a:rPr>
                         <a:t>70%</a:t>
                       </a:r>
@@ -15725,6 +16400,9 @@
                           <a:solidFill>
                             <a:srgbClr val="24303F"/>
                           </a:solidFill>
+                          <a:latin typeface="BIZ UDPゴシック"/>
+                          <a:ea typeface="BIZ UDPゴシック"/>
+                          <a:cs typeface="BIZ UDPゴシック"/>
                         </a:rPr>
                         <a:t>73%</a:t>
                       </a:r>
@@ -15776,6 +16454,9 @@
                           <a:solidFill>
                             <a:srgbClr val="24303F"/>
                           </a:solidFill>
+                          <a:latin typeface="BIZ UDPゴシック"/>
+                          <a:ea typeface="BIZ UDPゴシック"/>
+                          <a:cs typeface="BIZ UDPゴシック"/>
                         </a:rPr>
                         <a:t>WHO-5（2週・0〜25）</a:t>
                       </a:r>
@@ -15825,6 +16506,9 @@
                           <a:solidFill>
                             <a:srgbClr val="24303F"/>
                           </a:solidFill>
+                          <a:latin typeface="BIZ UDPゴシック"/>
+                          <a:ea typeface="BIZ UDPゴシック"/>
+                          <a:cs typeface="BIZ UDPゴシック"/>
                         </a:rPr>
                         <a:t>13.2</a:t>
                       </a:r>
@@ -15874,6 +16558,9 @@
                           <a:solidFill>
                             <a:srgbClr val="24303F"/>
                           </a:solidFill>
+                          <a:latin typeface="BIZ UDPゴシック"/>
+                          <a:ea typeface="BIZ UDPゴシック"/>
+                          <a:cs typeface="BIZ UDPゴシック"/>
                         </a:rPr>
                         <a:t>13.1</a:t>
                       </a:r>
@@ -15923,6 +16610,9 @@
                           <a:solidFill>
                             <a:srgbClr val="24303F"/>
                           </a:solidFill>
+                          <a:latin typeface="BIZ UDPゴシック"/>
+                          <a:ea typeface="BIZ UDPゴシック"/>
+                          <a:cs typeface="BIZ UDPゴシック"/>
                         </a:rPr>
                         <a:t>13.3</a:t>
                       </a:r>
@@ -15974,6 +16664,9 @@
                           <a:solidFill>
                             <a:srgbClr val="24303F"/>
                           </a:solidFill>
+                          <a:latin typeface="BIZ UDPゴシック"/>
+                          <a:ea typeface="BIZ UDPゴシック"/>
+                          <a:cs typeface="BIZ UDPゴシック"/>
                         </a:rPr>
                         <a:t>推し疲れ（1〜5）</a:t>
                       </a:r>
@@ -16023,6 +16716,9 @@
                           <a:solidFill>
                             <a:srgbClr val="24303F"/>
                           </a:solidFill>
+                          <a:latin typeface="BIZ UDPゴシック"/>
+                          <a:ea typeface="BIZ UDPゴシック"/>
+                          <a:cs typeface="BIZ UDPゴシック"/>
                         </a:rPr>
                         <a:t>2.9</a:t>
                       </a:r>
@@ -16072,6 +16768,9 @@
                           <a:solidFill>
                             <a:srgbClr val="24303F"/>
                           </a:solidFill>
+                          <a:latin typeface="BIZ UDPゴシック"/>
+                          <a:ea typeface="BIZ UDPゴシック"/>
+                          <a:cs typeface="BIZ UDPゴシック"/>
                         </a:rPr>
                         <a:t>3.0</a:t>
                       </a:r>
@@ -16121,6 +16820,9 @@
                           <a:solidFill>
                             <a:srgbClr val="24303F"/>
                           </a:solidFill>
+                          <a:latin typeface="BIZ UDPゴシック"/>
+                          <a:ea typeface="BIZ UDPゴシック"/>
+                          <a:cs typeface="BIZ UDPゴシック"/>
                         </a:rPr>
                         <a:t>2.9</a:t>
                       </a:r>
@@ -16172,6 +16874,9 @@
                           <a:solidFill>
                             <a:srgbClr val="24303F"/>
                           </a:solidFill>
+                          <a:latin typeface="BIZ UDPゴシック"/>
+                          <a:ea typeface="BIZ UDPゴシック"/>
+                          <a:cs typeface="BIZ UDPゴシック"/>
                         </a:rPr>
                         <a:t>充実（1〜5）</a:t>
                       </a:r>
@@ -16221,6 +16926,9 @@
                           <a:solidFill>
                             <a:srgbClr val="24303F"/>
                           </a:solidFill>
+                          <a:latin typeface="BIZ UDPゴシック"/>
+                          <a:ea typeface="BIZ UDPゴシック"/>
+                          <a:cs typeface="BIZ UDPゴシック"/>
                         </a:rPr>
                         <a:t>3.8</a:t>
                       </a:r>
@@ -16270,6 +16978,9 @@
                           <a:solidFill>
                             <a:srgbClr val="24303F"/>
                           </a:solidFill>
+                          <a:latin typeface="BIZ UDPゴシック"/>
+                          <a:ea typeface="BIZ UDPゴシック"/>
+                          <a:cs typeface="BIZ UDPゴシック"/>
                         </a:rPr>
                         <a:t>3.8</a:t>
                       </a:r>
@@ -16319,6 +17030,9 @@
                           <a:solidFill>
                             <a:srgbClr val="24303F"/>
                           </a:solidFill>
+                          <a:latin typeface="BIZ UDPゴシック"/>
+                          <a:ea typeface="BIZ UDPゴシック"/>
+                          <a:cs typeface="BIZ UDPゴシック"/>
                         </a:rPr>
                         <a:t>3.7</a:t>
                       </a:r>
@@ -16370,6 +17084,9 @@
                           <a:solidFill>
                             <a:srgbClr val="24303F"/>
                           </a:solidFill>
+                          <a:latin typeface="BIZ UDPゴシック"/>
+                          <a:ea typeface="BIZ UDPゴシック"/>
+                          <a:cs typeface="BIZ UDPゴシック"/>
                         </a:rPr>
                         <a:t>記録率（1〜2週）</a:t>
                       </a:r>
@@ -16419,6 +17136,9 @@
                           <a:solidFill>
                             <a:srgbClr val="24303F"/>
                           </a:solidFill>
+                          <a:latin typeface="BIZ UDPゴシック"/>
+                          <a:ea typeface="BIZ UDPゴシック"/>
+                          <a:cs typeface="BIZ UDPゴシック"/>
                         </a:rPr>
                         <a:t>89%</a:t>
                       </a:r>
@@ -16468,6 +17188,9 @@
                           <a:solidFill>
                             <a:srgbClr val="24303F"/>
                           </a:solidFill>
+                          <a:latin typeface="BIZ UDPゴシック"/>
+                          <a:ea typeface="BIZ UDPゴシック"/>
+                          <a:cs typeface="BIZ UDPゴシック"/>
                         </a:rPr>
                         <a:t>88%</a:t>
                       </a:r>
@@ -16517,6 +17240,9 @@
                           <a:solidFill>
                             <a:srgbClr val="24303F"/>
                           </a:solidFill>
+                          <a:latin typeface="BIZ UDPゴシック"/>
+                          <a:ea typeface="BIZ UDPゴシック"/>
+                          <a:cs typeface="BIZ UDPゴシック"/>
                         </a:rPr>
                         <a:t>90%</a:t>
                       </a:r>
@@ -16696,6 +17422,9 @@
                 <a:solidFill>
                   <a:srgbClr val="0B3C6E"/>
                 </a:solidFill>
+                <a:latin typeface="BIZ UDPゴシック"/>
+                <a:ea typeface="BIZ UDPゴシック"/>
+                <a:cs typeface="BIZ UDPゴシック"/>
               </a:rPr>
               <a:t>2週時点の WHO-5 で層別して割り付けたため、主要な指標の差は小さい</a:t>
             </a:r>
@@ -16712,6 +17441,9 @@
                 <a:solidFill>
                   <a:srgbClr val="24303F"/>
                 </a:solidFill>
+                <a:latin typeface="BIZ UDPゴシック"/>
+                <a:ea typeface="BIZ UDPゴシック"/>
+                <a:cs typeface="BIZ UDPゴシック"/>
               </a:rPr>
               <a:t>主要解析では2週時点の WHO-5 を共変量に入れる（解析計画書どおり）</a:t>
             </a:r>
@@ -16775,6 +17507,9 @@
                 <a:solidFill>
                   <a:srgbClr val="E8457C"/>
                 </a:solidFill>
+                <a:latin typeface="BIZ UDPゴシック"/>
+                <a:ea typeface="BIZ UDPゴシック"/>
+                <a:cs typeface="BIZ UDPゴシック"/>
               </a:rPr>
               <a:t>※ 想定値：実データで差し替え</a:t>
             </a:r>
@@ -16827,6 +17562,9 @@
                 <a:solidFill>
                   <a:srgbClr val="24303F"/>
                 </a:solidFill>
+                <a:latin typeface="BIZ UDPゴシック"/>
+                <a:ea typeface="BIZ UDPゴシック"/>
+                <a:cs typeface="BIZ UDPゴシック"/>
               </a:rPr>
               <a:t>ベイズ個人ツイン：2週間の初期結果</a:t>
             </a:r>
@@ -16845,9 +17583,14 @@
         </p:nvSpPr>
         <p:spPr/>
         <p:txBody>
-          <a:bodyPr/>
-          <a:p>
-            <a:r>
+          <a:bodyPr lIns="27432" rIns="0" wrap="none"/>
+          <a:p>
+            <a:r>
+              <a:rPr sz="900">
+                <a:latin typeface="BIZ UDPゴシック"/>
+                <a:ea typeface="BIZ UDPゴシック"/>
+                <a:cs typeface="BIZ UDPゴシック"/>
+              </a:rPr>
               <a:t>2026/11/27</a:t>
             </a:r>
           </a:p>
@@ -16868,7 +17611,11 @@
           <a:bodyPr/>
           <a:p>
             <a:fld id="{B6F15528-21DE-4FAA-801E-634DDDAF4B2B}" type="slidenum">
-              <a:rPr lang="en-US"/>
+              <a:rPr lang="en-US">
+                <a:latin typeface="BIZ UDPゴシック"/>
+                <a:ea typeface="BIZ UDPゴシック"/>
+                <a:cs typeface="BIZ UDPゴシック"/>
+              </a:rPr>
               <a:t>7</a:t>
             </a:fld>
           </a:p>
@@ -16969,6 +17716,9 @@
                 <a:solidFill>
                   <a:srgbClr val="12A38A"/>
                 </a:solidFill>
+                <a:latin typeface="BIZ UDPゴシック"/>
+                <a:ea typeface="BIZ UDPゴシック"/>
+                <a:cs typeface="BIZ UDPゴシック"/>
               </a:rPr>
               <a:t>約27%</a:t>
             </a:r>
@@ -16985,6 +17735,9 @@
                 <a:solidFill>
                   <a:srgbClr val="24303F"/>
                 </a:solidFill>
+                <a:latin typeface="BIZ UDPゴシック"/>
+                <a:ea typeface="BIZ UDPゴシック"/>
+                <a:cs typeface="BIZ UDPゴシック"/>
               </a:rPr>
               <a:t>推し疲れの予測の幅が縮んだ（充実は約26%）</a:t>
             </a:r>
@@ -17142,6 +17895,9 @@
                 <a:solidFill>
                   <a:srgbClr val="0B3C6E"/>
                 </a:solidFill>
+                <a:latin typeface="BIZ UDPゴシック"/>
+                <a:ea typeface="BIZ UDPゴシック"/>
+                <a:cs typeface="BIZ UDPゴシック"/>
               </a:rPr>
               <a:t>進捗①の試算との比較</a:t>
             </a:r>
@@ -17177,7 +17933,7 @@
               <a:buClr>
                 <a:srgbClr val="0099FF"/>
               </a:buClr>
-              <a:buFont typeface="Arial"/>
+              <a:buFont typeface="BIZ UDPゴシック"/>
               <a:buChar char="•"/>
             </a:pPr>
             <a:r>
@@ -17185,6 +17941,9 @@
                 <a:solidFill>
                   <a:srgbClr val="24303F"/>
                 </a:solidFill>
+                <a:latin typeface="BIZ UDPゴシック"/>
+                <a:ea typeface="BIZ UDPゴシック"/>
+                <a:cs typeface="BIZ UDPゴシック"/>
               </a:rPr>
               <a:t>試算では推し疲れ ±0.83、実際は ±0.86</a:t>
             </a:r>
@@ -17197,7 +17956,7 @@
               <a:buClr>
                 <a:srgbClr val="0099FF"/>
               </a:buClr>
-              <a:buFont typeface="Arial"/>
+              <a:buFont typeface="BIZ UDPゴシック"/>
               <a:buChar char="•"/>
             </a:pPr>
             <a:r>
@@ -17205,6 +17964,9 @@
                 <a:solidFill>
                   <a:srgbClr val="24303F"/>
                 </a:solidFill>
+                <a:latin typeface="BIZ UDPゴシック"/>
+                <a:ea typeface="BIZ UDPゴシック"/>
+                <a:cs typeface="BIZ UDPゴシック"/>
               </a:rPr>
               <a:t>記録が途切れた日がある人ほど縮みが小さい</a:t>
             </a:r>
@@ -17217,7 +17979,7 @@
               <a:buClr>
                 <a:srgbClr val="E8457C"/>
               </a:buClr>
-              <a:buFont typeface="Arial"/>
+              <a:buFont typeface="BIZ UDPゴシック"/>
               <a:buChar char="•"/>
             </a:pPr>
             <a:r>
@@ -17225,6 +17987,9 @@
                 <a:solidFill>
                   <a:srgbClr val="24303F"/>
                 </a:solidFill>
+                <a:latin typeface="BIZ UDPゴシック"/>
+                <a:ea typeface="BIZ UDPゴシック"/>
+                <a:cs typeface="BIZ UDPゴシック"/>
               </a:rPr>
               <a:t>6週時点での実測との一致は、終了後に評価（RQ1）</a:t>
             </a:r>
@@ -17264,6 +18029,9 @@
                 <a:solidFill>
                   <a:srgbClr val="5A6676"/>
                 </a:solidFill>
+                <a:latin typeface="BIZ UDPゴシック"/>
+                <a:ea typeface="BIZ UDPゴシック"/>
+                <a:cs typeface="BIZ UDPゴシック"/>
               </a:rPr>
               <a:t>※ 区間の幅は「記録0日時点の母集団モデル」と「14日の記録で更新したツイン」の参加者平均</a:t>
             </a:r>
@@ -17327,6 +18095,9 @@
                 <a:solidFill>
                   <a:srgbClr val="E8457C"/>
                 </a:solidFill>
+                <a:latin typeface="BIZ UDPゴシック"/>
+                <a:ea typeface="BIZ UDPゴシック"/>
+                <a:cs typeface="BIZ UDPゴシック"/>
               </a:rPr>
               <a:t>※ 想定値：実データで差し替え</a:t>
             </a:r>
@@ -17379,6 +18150,9 @@
                 <a:solidFill>
                   <a:srgbClr val="24303F"/>
                 </a:solidFill>
+                <a:latin typeface="BIZ UDPゴシック"/>
+                <a:ea typeface="BIZ UDPゴシック"/>
+                <a:cs typeface="BIZ UDPゴシック"/>
               </a:rPr>
               <a:t>いちばんの疲れの中身（記録期間）</a:t>
             </a:r>
@@ -17397,9 +18171,14 @@
         </p:nvSpPr>
         <p:spPr/>
         <p:txBody>
-          <a:bodyPr/>
-          <a:p>
-            <a:r>
+          <a:bodyPr lIns="27432" rIns="0" wrap="none"/>
+          <a:p>
+            <a:r>
+              <a:rPr sz="900">
+                <a:latin typeface="BIZ UDPゴシック"/>
+                <a:ea typeface="BIZ UDPゴシック"/>
+                <a:cs typeface="BIZ UDPゴシック"/>
+              </a:rPr>
               <a:t>2026/11/27</a:t>
             </a:r>
           </a:p>
@@ -17420,7 +18199,11 @@
           <a:bodyPr/>
           <a:p>
             <a:fld id="{B6F15528-21DE-4FAA-801E-634DDDAF4B2B}" type="slidenum">
-              <a:rPr lang="en-US"/>
+              <a:rPr lang="en-US">
+                <a:latin typeface="BIZ UDPゴシック"/>
+                <a:ea typeface="BIZ UDPゴシック"/>
+                <a:cs typeface="BIZ UDPゴシック"/>
+              </a:rPr>
               <a:t>8</a:t>
             </a:fld>
           </a:p>
@@ -17553,6 +18336,9 @@
                 <a:solidFill>
                   <a:srgbClr val="0B3C6E"/>
                 </a:solidFill>
+                <a:latin typeface="BIZ UDPゴシック"/>
+                <a:ea typeface="BIZ UDPゴシック"/>
+                <a:cs typeface="BIZ UDPゴシック"/>
               </a:rPr>
               <a:t>睡眠がいちばん多い</a:t>
             </a:r>
@@ -17569,6 +18355,9 @@
                 <a:solidFill>
                   <a:srgbClr val="24303F"/>
                 </a:solidFill>
+                <a:latin typeface="BIZ UDPゴシック"/>
+                <a:ea typeface="BIZ UDPゴシック"/>
+                <a:cs typeface="BIZ UDPゴシック"/>
               </a:rPr>
               <a:t>深夜の配信・SNS が中心。平日に集中</a:t>
             </a:r>
@@ -17684,6 +18473,9 @@
                 <a:solidFill>
                   <a:srgbClr val="0B3C6E"/>
                 </a:solidFill>
+                <a:latin typeface="BIZ UDPゴシック"/>
+                <a:ea typeface="BIZ UDPゴシック"/>
+                <a:cs typeface="BIZ UDPゴシック"/>
               </a:rPr>
               <a:t>出費は月末と発売日に集中</a:t>
             </a:r>
@@ -17700,6 +18492,9 @@
                 <a:solidFill>
                   <a:srgbClr val="24303F"/>
                 </a:solidFill>
+                <a:latin typeface="BIZ UDPゴシック"/>
+                <a:ea typeface="BIZ UDPゴシック"/>
+                <a:cs typeface="BIZ UDPゴシック"/>
               </a:rPr>
               <a:t>グッズの発売・予約のタイミングと一致</a:t>
             </a:r>
@@ -17761,6 +18556,9 @@
                 <a:solidFill>
                   <a:srgbClr val="7C6BC4"/>
                 </a:solidFill>
+                <a:latin typeface="BIZ UDPゴシック"/>
+                <a:ea typeface="BIZ UDPゴシック"/>
+                <a:cs typeface="BIZ UDPゴシック"/>
               </a:rPr>
               <a:t>予備調査（睡眠への支障 約3割）と同じく、睡眠の疲れが最も多い。提案も睡眠に関わる案が選ばれやすい</a:t>
             </a:r>
@@ -17824,6 +18622,9 @@
                 <a:solidFill>
                   <a:srgbClr val="E8457C"/>
                 </a:solidFill>
+                <a:latin typeface="BIZ UDPゴシック"/>
+                <a:ea typeface="BIZ UDPゴシック"/>
+                <a:cs typeface="BIZ UDPゴシック"/>
               </a:rPr>
               <a:t>※ 想定値：実データで差し替え</a:t>
             </a:r>
@@ -17876,6 +18677,9 @@
                 <a:solidFill>
                   <a:srgbClr val="24303F"/>
                 </a:solidFill>
+                <a:latin typeface="BIZ UDPゴシック"/>
+                <a:ea typeface="BIZ UDPゴシック"/>
+                <a:cs typeface="BIZ UDPゴシック"/>
               </a:rPr>
               <a:t>介入1週目：どの提案が選ばれ、実行されたか</a:t>
             </a:r>
@@ -17894,9 +18698,14 @@
         </p:nvSpPr>
         <p:spPr/>
         <p:txBody>
-          <a:bodyPr/>
-          <a:p>
-            <a:r>
+          <a:bodyPr lIns="27432" rIns="0" wrap="none"/>
+          <a:p>
+            <a:r>
+              <a:rPr sz="900">
+                <a:latin typeface="BIZ UDPゴシック"/>
+                <a:ea typeface="BIZ UDPゴシック"/>
+                <a:cs typeface="BIZ UDPゴシック"/>
+              </a:rPr>
               <a:t>2026/11/27</a:t>
             </a:r>
           </a:p>
@@ -17917,7 +18726,11 @@
           <a:bodyPr/>
           <a:p>
             <a:fld id="{B6F15528-21DE-4FAA-801E-634DDDAF4B2B}" type="slidenum">
-              <a:rPr lang="en-US"/>
+              <a:rPr lang="en-US">
+                <a:latin typeface="BIZ UDPゴシック"/>
+                <a:ea typeface="BIZ UDPゴシック"/>
+                <a:cs typeface="BIZ UDPゴシック"/>
+              </a:rPr>
               <a:t>9</a:t>
             </a:fld>
           </a:p>
@@ -17974,6 +18787,9 @@
                 <a:solidFill>
                   <a:srgbClr val="0B3C6E"/>
                 </a:solidFill>
+                <a:latin typeface="BIZ UDPゴシック"/>
+                <a:ea typeface="BIZ UDPゴシック"/>
+                <a:cs typeface="BIZ UDPゴシック"/>
               </a:rPr>
               <a:t>「楽しさキープ」と「バランス」で約8割。減らす方向の「回復重視」は2割弱</a:t>
             </a:r>
@@ -18057,6 +18873,9 @@
                 <a:solidFill>
                   <a:srgbClr val="0B3C6E"/>
                 </a:solidFill>
+                <a:latin typeface="BIZ UDPゴシック"/>
+                <a:ea typeface="BIZ UDPゴシック"/>
+                <a:cs typeface="BIZ UDPゴシック"/>
               </a:rPr>
               <a:t>予備調査の「増やしたい ＞ 減らしたい」と一致</a:t>
             </a:r>
@@ -18073,6 +18892,9 @@
                 <a:solidFill>
                   <a:srgbClr val="24303F"/>
                 </a:solidFill>
+                <a:latin typeface="BIZ UDPゴシック"/>
+                <a:ea typeface="BIZ UDPゴシック"/>
+                <a:cs typeface="BIZ UDPゴシック"/>
               </a:rPr>
               <a:t>「組み替える」提案にしたことで、見送りは5%前後に抑えられている</a:t>
             </a:r>
@@ -18156,6 +18978,9 @@
                 <a:solidFill>
                   <a:srgbClr val="0099FF"/>
                 </a:solidFill>
+                <a:latin typeface="BIZ UDPゴシック"/>
+                <a:ea typeface="BIZ UDPゴシック"/>
+                <a:cs typeface="BIZ UDPゴシック"/>
               </a:rPr>
               <a:t>群B</a:t>
             </a:r>
@@ -18195,6 +19020,9 @@
                 <a:solidFill>
                   <a:srgbClr val="0099FF"/>
                 </a:solidFill>
+                <a:latin typeface="BIZ UDPゴシック"/>
+                <a:ea typeface="BIZ UDPゴシック"/>
+                <a:cs typeface="BIZ UDPゴシック"/>
               </a:rPr>
               <a:t>54%</a:t>
             </a:r>
@@ -18234,6 +19062,9 @@
                 <a:solidFill>
                   <a:srgbClr val="5A6676"/>
                 </a:solidFill>
+                <a:latin typeface="BIZ UDPゴシック"/>
+                <a:ea typeface="BIZ UDPゴシック"/>
+                <a:cs typeface="BIZ UDPゴシック"/>
               </a:rPr>
               <a:t>選んだ案を実行できた</a:t>
             </a:r>
@@ -18317,6 +19148,9 @@
                 <a:solidFill>
                   <a:srgbClr val="12A38A"/>
                 </a:solidFill>
+                <a:latin typeface="BIZ UDPゴシック"/>
+                <a:ea typeface="BIZ UDPゴシック"/>
+                <a:cs typeface="BIZ UDPゴシック"/>
               </a:rPr>
               <a:t>群C</a:t>
             </a:r>
@@ -18356,6 +19190,9 @@
                 <a:solidFill>
                   <a:srgbClr val="12A38A"/>
                 </a:solidFill>
+                <a:latin typeface="BIZ UDPゴシック"/>
+                <a:ea typeface="BIZ UDPゴシック"/>
+                <a:cs typeface="BIZ UDPゴシック"/>
               </a:rPr>
               <a:t>63%</a:t>
             </a:r>
@@ -18395,6 +19232,9 @@
                 <a:solidFill>
                   <a:srgbClr val="5A6676"/>
                 </a:solidFill>
+                <a:latin typeface="BIZ UDPゴシック"/>
+                <a:ea typeface="BIZ UDPゴシック"/>
+                <a:cs typeface="BIZ UDPゴシック"/>
               </a:rPr>
               <a:t>選んだ案を実行できた</a:t>
             </a:r>
@@ -18478,6 +19318,9 @@
                 <a:solidFill>
                   <a:srgbClr val="E8457C"/>
                 </a:solidFill>
+                <a:latin typeface="BIZ UDPゴシック"/>
+                <a:ea typeface="BIZ UDPゴシック"/>
+                <a:cs typeface="BIZ UDPゴシック"/>
               </a:rPr>
               <a:t>まだ1週分のみ</a:t>
             </a:r>
@@ -18494,6 +19337,9 @@
                 <a:solidFill>
                   <a:srgbClr val="24303F"/>
                 </a:solidFill>
+                <a:latin typeface="BIZ UDPゴシック"/>
+                <a:ea typeface="BIZ UDPゴシック"/>
+                <a:cs typeface="BIZ UDPゴシック"/>
               </a:rPr>
               <a:t>群間の検定は事前に決めたとおり終了後に行う。途中で結論は出さない</a:t>
             </a:r>
@@ -18557,6 +19403,9 @@
                 <a:solidFill>
                   <a:srgbClr val="E8457C"/>
                 </a:solidFill>
+                <a:latin typeface="BIZ UDPゴシック"/>
+                <a:ea typeface="BIZ UDPゴシック"/>
+                <a:cs typeface="BIZ UDPゴシック"/>
               </a:rPr>
               <a:t>※ 想定値：実データで差し替え</a:t>
             </a:r>
@@ -18614,12 +19463,12 @@
     </a:clrScheme>
     <a:fontScheme name="mixlab">
       <a:majorFont>
-        <a:latin typeface="Arial"/>
+        <a:latin typeface="BIZ UDPゴシック"/>
         <a:ea typeface="BIZ UDPゴシック"/>
         <a:cs typeface=""/>
       </a:majorFont>
       <a:minorFont>
-        <a:latin typeface="Arial"/>
+        <a:latin typeface="BIZ UDPゴシック"/>
         <a:ea typeface="BIZ UDPゴシック"/>
         <a:cs typeface=""/>
       </a:minorFont>
@@ -18815,7 +19664,7 @@
     </a:clrScheme>
     <a:fontScheme name="Office">
       <a:majorFont>
-        <a:latin typeface="游ゴシック Light" panose="020F0302020204030204"/>
+        <a:latin typeface="BIZ UDPゴシック"/>
         <a:ea typeface=""/>
         <a:cs typeface=""/>
         <a:font script="Jpan" typeface="游ゴシック Light"/>
@@ -18850,7 +19699,7 @@
         <a:font script="Geor" typeface="Sylfaen"/>
       </a:majorFont>
       <a:minorFont>
-        <a:latin typeface="游ゴシック" panose="020F0502020204030204"/>
+        <a:latin typeface="BIZ UDPゴシック"/>
         <a:ea typeface=""/>
         <a:cs typeface=""/>
         <a:font script="Jpan" typeface="游ゴシック"/>
